--- a/presentation-r4.pptx
+++ b/presentation-r4.pptx
@@ -1742,25 +1742,68 @@
           <a:p>
             <a:r>
               <a:rPr lang="en-US" dirty="0"/>
-              <a:t>Just falls through and continues synchronously. No thread switch, no callback overhead. The Struct-to-Heap Boxing Story: The state machine is declared as a struct, not a class.</a:t>
-            </a:r>
+              <a:t>Just falls through and continues synchronously. No thread switch, no callback overhead. </a:t>
+            </a:r>
+          </a:p>
+          <a:p>
+            <a:endParaRPr lang="en-US" dirty="0"/>
           </a:p>
           <a:p>
             <a:r>
               <a:rPr lang="en-US" dirty="0"/>
-              <a:t>It starts on the stack - no heap allocation. If the method runs to completion without ever truly suspending (all awaits hit the IsCompleted fast path), zero allocations. But if it does need to suspend, the builder boxes the struct onto the heap so it can survive beyond the current stack frame.</a:t>
-            </a:r>
-          </a:p>
-          <a:p>
+              <a:t>- The Struct-to-Heap Boxing Story: The state machine is declared as a struct, not a class.</a:t>
+            </a:r>
+          </a:p>
+          <a:p>
+            <a:pPr marL="171450" indent="-171450">
+              <a:buFontTx/>
+              <a:buChar char="-"/>
+            </a:pPr>
             <a:r>
               <a:rPr lang="en-US" dirty="0"/>
-              <a:t>In the best case: zero allocations. In the typical case: one allocation (the boxed state machine). Compare with ContinueWith: closures, delegates, and Task objects at each step.</a:t>
-            </a:r>
-          </a:p>
-          <a:p>
+              <a:t>Starts on the stack - no heap allocation. If the method runs to completion without ever suspending (all awaits hit the IsCompleted fast path), zero allocations. </a:t>
+            </a:r>
+          </a:p>
+          <a:p>
+            <a:pPr marL="171450" indent="-171450">
+              <a:buFontTx/>
+              <a:buChar char="-"/>
+            </a:pPr>
             <a:r>
               <a:rPr lang="en-US" dirty="0"/>
-              <a:t>The compiler approach is far more efficient. async/await: a struct, a switch, some callbacks. No magic - just a very clever compiler rewrite.</a:t>
+              <a:t>But if it does need to suspend, the builder boxes the struct onto the heap so it can survive beyond the current stack frame.</a:t>
+            </a:r>
+          </a:p>
+          <a:p>
+            <a:pPr marL="171450" indent="-171450">
+              <a:buFontTx/>
+              <a:buChar char="-"/>
+            </a:pPr>
+            <a:r>
+              <a:rPr lang="en-US" dirty="0"/>
+              <a:t>Best case: zero allocations; typical case: one allocation (the boxed state machine). </a:t>
+            </a:r>
+          </a:p>
+          <a:p>
+            <a:pPr marL="171450" indent="-171450">
+              <a:buFontTx/>
+              <a:buChar char="-"/>
+            </a:pPr>
+            <a:r>
+              <a:rPr lang="en-US" dirty="0"/>
+              <a:t>Compared with ContinueWith: closures, delegates, and Task objects at each step.</a:t>
+            </a:r>
+          </a:p>
+          <a:p>
+            <a:r>
+              <a:rPr lang="en-US" dirty="0"/>
+              <a:t>- The compiler approach is far more efficient. async/await: a struct, a “switch”, some callbacks. </a:t>
+            </a:r>
+          </a:p>
+          <a:p>
+            <a:r>
+              <a:rPr lang="en-US" dirty="0"/>
+              <a:t>- Conclusion: Not magic - just a very clever compiler rewrite.</a:t>
             </a:r>
           </a:p>
         </p:txBody>
@@ -2327,59 +2370,19 @@
           <a:p>
             <a:r>
               <a:rPr lang="en-US" dirty="0"/>
-              <a:t>When you write 'async Task MyMethod()', the compiler generates a state </a:t>
-            </a:r>
-            <a:r>
-              <a:rPr lang="en-US"/>
-              <a:t>machine - </a:t>
-            </a:r>
+              <a:t>When you write 'async Task MyMethod()', the compiler generates a state machine - a struct with MoveNext() containing all your code as a switch statement. Each await is a potential suspension point. When execution reaches an await, the state machine asks the awaiter: 'Are you done?' If yes - fast path - it keeps running.</a:t>
+            </a:r>
+          </a:p>
+          <a:p>
             <a:r>
               <a:rPr lang="en-US" dirty="0"/>
-              <a:t>a struct with MoveNext() containing all your code as a switch statement. Each await is a potential suspension point. When execution reaches an await, the state machine asks the awaiter: 'Are you done?' If </a:t>
-            </a:r>
-            <a:r>
-              <a:rPr lang="en-US"/>
-              <a:t>yes - </a:t>
-            </a:r>
+              <a:t>If not, it records state, registers MoveNext as a callback, and returns - freeing the thread. When the awaited operation completes, the builder restores ExecutionContext, and either posts MoveNext to the captured SynchronizationContext or queues it to the ThreadPool. Your code resumes at the right state.</a:t>
+            </a:r>
+          </a:p>
+          <a:p>
             <a:r>
               <a:rPr lang="en-US" dirty="0"/>
-              <a:t>fast </a:t>
-            </a:r>
-            <a:r>
-              <a:rPr lang="en-US"/>
-              <a:t>path - </a:t>
-            </a:r>
-            <a:r>
-              <a:rPr lang="en-US" dirty="0"/>
-              <a:t>it keeps running.</a:t>
-            </a:r>
-          </a:p>
-          <a:p>
-            <a:r>
-              <a:rPr lang="en-US" dirty="0"/>
-              <a:t>If not, it records state, registers MoveNext as a callback, and </a:t>
-            </a:r>
-            <a:r>
-              <a:rPr lang="en-US"/>
-              <a:t>returns - </a:t>
-            </a:r>
-            <a:r>
-              <a:rPr lang="en-US" dirty="0"/>
-              <a:t>freeing the thread. When the awaited operation completes, the builder restores ExecutionContext, and either posts MoveNext to the captured SynchronizationContext or queues it to the ThreadPool. Your code resumes at the right state.</a:t>
-            </a:r>
-          </a:p>
-          <a:p>
-            <a:r>
-              <a:rPr lang="en-US" dirty="0"/>
-              <a:t>The Task returned to the caller is just a </a:t>
-            </a:r>
-            <a:r>
-              <a:rPr lang="en-US"/>
-              <a:t>promise - </a:t>
-            </a:r>
-            <a:r>
-              <a:rPr lang="en-US" dirty="0"/>
-              <a:t>a handle on the outcome. When MoveNext falls through, the builder calls SetResult, and the caller's own await can resume. Every piece has a job: async exists to free threads during waits.</a:t>
+              <a:t>The Task returned to the caller is just a promise - a handle on the outcome. When MoveNext falls through, the builder calls SetResult, and the caller's own await can resume. Every piece has a job: async exists to free threads during waits.</a:t>
             </a:r>
           </a:p>
           <a:p>
@@ -2482,34 +2485,229 @@
           <a:bodyPr/>
           <a:lstStyle/>
           <a:p>
+            <a:pPr marL="171450" indent="-171450">
+              <a:buFontTx/>
+              <a:buChar char="-"/>
+            </a:pPr>
             <a:r>
               <a:rPr lang="en-US" dirty="0"/>
-              <a:t>ValueTask&lt;T&gt; is a struct that wraps either a bare T result value or a Task&lt;T&gt;. The key insight: if the operation completes synchronously and the result is already available, ValueTask&lt;T&gt; can return it without allocating a Task object on the heap. This is a zero-allocation fast path.</a:t>
-            </a:r>
-          </a:p>
-          <a:p>
+              <a:t>What about </a:t>
+            </a:r>
+            <a:r>
+              <a:rPr lang="en-US" dirty="0" err="1"/>
+              <a:t>ValueTask</a:t>
+            </a:r>
             <a:r>
               <a:rPr lang="en-US" dirty="0"/>
-              <a:t>When the operation does need to suspend, ValueTask&lt;T&gt; falls back to wrapping a real Task&lt;T&gt;, so you get one heap allocation - same as if you'd used Task&lt;T&gt; directly. The benefit is purely on the synchronous-completion path: cache hits, buffered reads, already-computed results.</a:t>
-            </a:r>
-          </a:p>
-          <a:p>
+              <a:t>? What is it and when do we use it?</a:t>
+            </a:r>
+          </a:p>
+          <a:p>
+            <a:pPr marL="171450" indent="-171450">
+              <a:buFontTx/>
+              <a:buChar char="-"/>
+            </a:pPr>
+            <a:r>
+              <a:rPr lang="en-US" dirty="0" err="1"/>
+              <a:t>ValueTask</a:t>
+            </a:r>
             <a:r>
               <a:rPr lang="en-US" dirty="0"/>
-              <a:t>ValueTask has stricter usage rules than Task. You must await it exactly once, directly. Don't store it in a variable and await it later. Don't await it from multiple places concurrently. Don't call .Result or .GetAwaiter().GetResult() after it's already been awaited. These restrictions exist because the underlying IValueTaskSource may be pooled and reused.</a:t>
-            </a:r>
-          </a:p>
-          <a:p>
+              <a:t>&lt;T&gt; is a struct that wraps either a bare T result value or a Task&lt;T&gt;. </a:t>
+            </a:r>
+          </a:p>
+          <a:p>
+            <a:pPr marL="171450" indent="-171450">
+              <a:buFontTx/>
+              <a:buChar char="-"/>
+            </a:pPr>
             <a:r>
               <a:rPr lang="en-US" dirty="0"/>
-              <a:t>IValueTaskSource&lt;T&gt; is the advanced pattern for near-zero allocation async operations. Instead of allocating a new Task for each suspension, you can pool and reuse IValueTaskSource instances. This is used throughout .NET's internal I/O stack - Socket.ReceiveAsync, PipeReader.ReadAsync, and similar hot-path APIs.</a:t>
-            </a:r>
-          </a:p>
-          <a:p>
+              <a:t>The advantage: if the operation completes synchronously and the result is already available, ValueTask&lt;T&gt; can return it without allocating a Task object on the heap. This is a zero-allocation fast path.</a:t>
+            </a:r>
+          </a:p>
+          <a:p>
+            <a:pPr marL="171450" indent="-171450">
+              <a:buFontTx/>
+              <a:buChar char="-"/>
+            </a:pPr>
             <a:r>
               <a:rPr lang="en-US" dirty="0"/>
-              <a:t>Profile before switching from Task&lt;T&gt; to ValueTask&lt;T&gt;. The allocation savings only matter on proven hot paths - methods called thousands of times per second where GC pressure is measurable. For most application code, Task&lt;T&gt; is simpler and has no usage restrictions. ValueTask&lt;T&gt; is a performance tool for library authors and framework internals.</a:t>
-            </a:r>
+              <a:t>When the operation does need to suspend, </a:t>
+            </a:r>
+            <a:r>
+              <a:rPr lang="en-US" dirty="0" err="1"/>
+              <a:t>ValueTask</a:t>
+            </a:r>
+            <a:r>
+              <a:rPr lang="en-US" dirty="0"/>
+              <a:t>&lt;T&gt; falls back to wrapping a real Task&lt;T&gt;, so you get one heap allocation - same as if you'd used Task&lt;T&gt; directly. The benefit is purely on the synchronous-completion path: cache hits, buffered reads, already-computed results.</a:t>
+            </a:r>
+          </a:p>
+          <a:p>
+            <a:pPr marL="171450" marR="0" lvl="0" indent="-171450" algn="l" defTabSz="914400" rtl="0" eaLnBrk="1" fontAlgn="auto" latinLnBrk="0" hangingPunct="1">
+              <a:lnSpc>
+                <a:spcPct val="100000"/>
+              </a:lnSpc>
+              <a:spcBef>
+                <a:spcPts val="0"/>
+              </a:spcBef>
+              <a:spcAft>
+                <a:spcPts val="0"/>
+              </a:spcAft>
+              <a:buClrTx/>
+              <a:buSzTx/>
+              <a:buFontTx/>
+              <a:buChar char="-"/>
+              <a:tabLst/>
+              <a:defRPr/>
+            </a:pPr>
+            <a:r>
+              <a:rPr lang="en-US" dirty="0"/>
+              <a:t>Caveats: </a:t>
+            </a:r>
+          </a:p>
+          <a:p>
+            <a:pPr marL="628650" marR="0" lvl="1" indent="-171450" algn="l" defTabSz="914400" rtl="0" eaLnBrk="1" fontAlgn="auto" latinLnBrk="0" hangingPunct="1">
+              <a:lnSpc>
+                <a:spcPct val="100000"/>
+              </a:lnSpc>
+              <a:spcBef>
+                <a:spcPts val="0"/>
+              </a:spcBef>
+              <a:spcAft>
+                <a:spcPts val="0"/>
+              </a:spcAft>
+              <a:buClrTx/>
+              <a:buSzTx/>
+              <a:buFontTx/>
+              <a:buChar char="-"/>
+              <a:tabLst/>
+              <a:defRPr/>
+            </a:pPr>
+            <a:r>
+              <a:rPr lang="en-US" dirty="0"/>
+              <a:t>You must await it exactly once, directly.</a:t>
+            </a:r>
+          </a:p>
+          <a:p>
+            <a:pPr marL="628650" marR="0" lvl="1" indent="-171450" algn="l" defTabSz="914400" rtl="0" eaLnBrk="1" fontAlgn="auto" latinLnBrk="0" hangingPunct="1">
+              <a:lnSpc>
+                <a:spcPct val="100000"/>
+              </a:lnSpc>
+              <a:spcBef>
+                <a:spcPts val="0"/>
+              </a:spcBef>
+              <a:spcAft>
+                <a:spcPts val="0"/>
+              </a:spcAft>
+              <a:buClrTx/>
+              <a:buSzTx/>
+              <a:buFontTx/>
+              <a:buChar char="-"/>
+              <a:tabLst/>
+              <a:defRPr/>
+            </a:pPr>
+            <a:r>
+              <a:rPr lang="en-US" dirty="0"/>
+              <a:t>Don't store it in a variable and await it later.</a:t>
+            </a:r>
+          </a:p>
+          <a:p>
+            <a:pPr marL="628650" marR="0" lvl="1" indent="-171450" algn="l" defTabSz="914400" rtl="0" eaLnBrk="1" fontAlgn="auto" latinLnBrk="0" hangingPunct="1">
+              <a:lnSpc>
+                <a:spcPct val="100000"/>
+              </a:lnSpc>
+              <a:spcBef>
+                <a:spcPts val="0"/>
+              </a:spcBef>
+              <a:spcAft>
+                <a:spcPts val="0"/>
+              </a:spcAft>
+              <a:buClrTx/>
+              <a:buSzTx/>
+              <a:buFontTx/>
+              <a:buChar char="-"/>
+              <a:tabLst/>
+              <a:defRPr/>
+            </a:pPr>
+            <a:r>
+              <a:rPr lang="en-US" dirty="0"/>
+              <a:t>Don't await it from multiple places concurrently. </a:t>
+            </a:r>
+          </a:p>
+          <a:p>
+            <a:pPr marL="628650" marR="0" lvl="1" indent="-171450" algn="l" defTabSz="914400" rtl="0" eaLnBrk="1" fontAlgn="auto" latinLnBrk="0" hangingPunct="1">
+              <a:lnSpc>
+                <a:spcPct val="100000"/>
+              </a:lnSpc>
+              <a:spcBef>
+                <a:spcPts val="0"/>
+              </a:spcBef>
+              <a:spcAft>
+                <a:spcPts val="0"/>
+              </a:spcAft>
+              <a:buClrTx/>
+              <a:buSzTx/>
+              <a:buFontTx/>
+              <a:buChar char="-"/>
+              <a:tabLst/>
+              <a:defRPr/>
+            </a:pPr>
+            <a:r>
+              <a:rPr lang="en-US" dirty="0"/>
+              <a:t>Don't call .Result or .</a:t>
+            </a:r>
+            <a:r>
+              <a:rPr lang="en-US" dirty="0" err="1"/>
+              <a:t>GetAwaiter</a:t>
+            </a:r>
+            <a:r>
+              <a:rPr lang="en-US" dirty="0"/>
+              <a:t>().</a:t>
+            </a:r>
+            <a:r>
+              <a:rPr lang="en-US" dirty="0" err="1"/>
+              <a:t>GetResult</a:t>
+            </a:r>
+            <a:r>
+              <a:rPr lang="en-US" dirty="0"/>
+              <a:t>() after it's already been awaited. </a:t>
+            </a:r>
+          </a:p>
+          <a:p>
+            <a:pPr marL="628650" marR="0" lvl="1" indent="-171450" algn="l" defTabSz="914400" rtl="0" eaLnBrk="1" fontAlgn="auto" latinLnBrk="0" hangingPunct="1">
+              <a:lnSpc>
+                <a:spcPct val="100000"/>
+              </a:lnSpc>
+              <a:spcBef>
+                <a:spcPts val="0"/>
+              </a:spcBef>
+              <a:spcAft>
+                <a:spcPts val="0"/>
+              </a:spcAft>
+              <a:buClrTx/>
+              <a:buSzTx/>
+              <a:buFontTx/>
+              <a:buChar char="-"/>
+              <a:tabLst/>
+              <a:defRPr/>
+            </a:pPr>
+            <a:r>
+              <a:rPr lang="en-US" dirty="0"/>
+              <a:t>These restrictions exist because the underlying </a:t>
+            </a:r>
+            <a:r>
+              <a:rPr lang="en-US" dirty="0" err="1"/>
+              <a:t>IValueTaskSource</a:t>
+            </a:r>
+            <a:r>
+              <a:rPr lang="en-US" dirty="0"/>
+              <a:t> may be pooled and reused.</a:t>
+            </a:r>
+          </a:p>
+          <a:p>
+            <a:endParaRPr lang="en-US" dirty="0"/>
           </a:p>
         </p:txBody>
       </p:sp>
@@ -3187,22 +3385,117 @@
           <a:bodyPr/>
           <a:lstStyle/>
           <a:p>
+            <a:pPr marL="171450" indent="-171450">
+              <a:buFontTx/>
+              <a:buChar char="-"/>
+            </a:pPr>
             <a:r>
               <a:rPr lang="en-US" dirty="0"/>
-              <a:t>The .NET ThreadPool is a pool of pre-created worker threads, managed by the runtime, that exist for the lifetime of your application. When you call Task.Run, the delegate is placed into a queue. One of the ThreadPool's worker threads dequeues it and executes it. Thread creation is expensive - allocating ~1 MB of stack space, making OS system calls. The pool solves this by reusing threads.</a:t>
-            </a:r>
-          </a:p>
-          <a:p>
+              <a:t>.NET </a:t>
+            </a:r>
+            <a:r>
+              <a:rPr lang="en-US" dirty="0" err="1"/>
+              <a:t>ThreadPool</a:t>
+            </a:r>
             <a:r>
               <a:rPr lang="en-US" dirty="0"/>
-              <a:t>The ThreadPool starts with a small number of threads, typically one per CPU core. If work items queue up faster than threads can process them, the pool slowly injects new threads - roughly one every 500ms. This conservative growth is intentional. But if you block many ThreadPool threads by calling .Result or .Wait(), you can starve the pool.</a:t>
-            </a:r>
-          </a:p>
-          <a:p>
+              <a:t> = pool of pre-created runtime managed worker threads </a:t>
+            </a:r>
+          </a:p>
+          <a:p>
+            <a:pPr marL="171450" indent="-171450">
+              <a:buFontTx/>
+              <a:buChar char="-"/>
+            </a:pPr>
             <a:r>
               <a:rPr lang="en-US" dirty="0"/>
-              <a:t>SynchronizationContext is an abstraction that answers: where should a continuation run? In WinForms, it posts to the UI thread's Win32 message loop. In WPF, it posts to the Dispatcher. In ASP.NET Core and console apps, there is no SynchronizationContext - it's null.</a:t>
-            </a:r>
+              <a:t>When you call Task.Run, the delegate is placed into a queue. </a:t>
+            </a:r>
+          </a:p>
+          <a:p>
+            <a:pPr marL="171450" indent="-171450">
+              <a:buFont typeface="Arial" panose="020B0604020202020204" pitchFamily="34" charset="0"/>
+              <a:buChar char="•"/>
+            </a:pPr>
+            <a:r>
+              <a:rPr lang="en-US" dirty="0"/>
+              <a:t>One of the ThreadPool's worker threads dequeues it and executes it.</a:t>
+            </a:r>
+          </a:p>
+          <a:p>
+            <a:pPr marL="171450" indent="-171450">
+              <a:buFont typeface="Arial" panose="020B0604020202020204" pitchFamily="34" charset="0"/>
+              <a:buChar char="•"/>
+            </a:pPr>
+            <a:r>
+              <a:rPr lang="en-US" dirty="0"/>
+              <a:t>The ThreadPool starts with a small number of threads, typically one per CPU core. If work items queue up faster than threads can process them, the pool slowly injects new threads.</a:t>
+            </a:r>
+          </a:p>
+          <a:p>
+            <a:pPr marL="171450" indent="-171450">
+              <a:buFont typeface="Arial" panose="020B0604020202020204" pitchFamily="34" charset="0"/>
+              <a:buChar char="•"/>
+            </a:pPr>
+            <a:r>
+              <a:rPr lang="en-US" dirty="0"/>
+              <a:t>You can starve the pool by calling async and await.</a:t>
+            </a:r>
+          </a:p>
+          <a:p>
+            <a:pPr marL="171450" indent="-171450">
+              <a:buFont typeface="Arial" panose="020B0604020202020204" pitchFamily="34" charset="0"/>
+              <a:buChar char="•"/>
+            </a:pPr>
+            <a:r>
+              <a:rPr lang="en-US" dirty="0" err="1"/>
+              <a:t>SynchronizationContext</a:t>
+            </a:r>
+            <a:r>
+              <a:rPr lang="en-US" dirty="0"/>
+              <a:t> is an abstraction that answers: where should a continuation run</a:t>
+            </a:r>
+            <a:r>
+              <a:rPr lang="en-US" b="1" dirty="0"/>
+              <a:t>(on which thread)?</a:t>
+            </a:r>
+          </a:p>
+          <a:p>
+            <a:pPr marL="628650" lvl="1" indent="-171450">
+              <a:buFont typeface="Arial" panose="020B0604020202020204" pitchFamily="34" charset="0"/>
+              <a:buChar char="•"/>
+            </a:pPr>
+            <a:r>
+              <a:rPr lang="en-US" dirty="0"/>
+              <a:t>In WinForms, it posts to the UI thread's Win32 message loop. </a:t>
+            </a:r>
+          </a:p>
+          <a:p>
+            <a:pPr marL="628650" lvl="1" indent="-171450">
+              <a:buFont typeface="Arial" panose="020B0604020202020204" pitchFamily="34" charset="0"/>
+              <a:buChar char="•"/>
+            </a:pPr>
+            <a:r>
+              <a:rPr lang="en-US" dirty="0"/>
+              <a:t>In WPF, it posts to the Dispatcher. </a:t>
+            </a:r>
+          </a:p>
+          <a:p>
+            <a:pPr marL="628650" lvl="1" indent="-171450">
+              <a:buFont typeface="Arial" panose="020B0604020202020204" pitchFamily="34" charset="0"/>
+              <a:buChar char="•"/>
+            </a:pPr>
+            <a:r>
+              <a:rPr lang="en-US" dirty="0"/>
+              <a:t>In ASP.NET Core and console apps, there is no SynchronizationContext - it's null.</a:t>
+            </a:r>
+          </a:p>
+          <a:p>
+            <a:pPr marL="0" lvl="0" indent="0">
+              <a:buFont typeface="Arial" panose="020B0604020202020204" pitchFamily="34" charset="0"/>
+              <a:buNone/>
+            </a:pPr>
+            <a:endParaRPr lang="en-US" dirty="0"/>
           </a:p>
           <a:p>
             <a:r>
@@ -3287,33 +3580,168 @@
           <a:bodyPr/>
           <a:lstStyle/>
           <a:p>
+            <a:pPr marL="171450" indent="-171450">
+              <a:buFont typeface="Arial" panose="020B0604020202020204" pitchFamily="34" charset="0"/>
+              <a:buChar char="•"/>
+            </a:pPr>
             <a:r>
               <a:rPr lang="en-US" dirty="0"/>
-              <a:t>After an await, your code might resume on a completely different thread. But ambient state - the current culture, security principal, per-request correlation IDs - needs to survive. ExecutionContext is an opaque container maintained by the runtime that holds all ambient data associated with the current flow of execution.</a:t>
-            </a:r>
-          </a:p>
-          <a:p>
+              <a:t>After an await, your code might resume on a completely different thread. </a:t>
+            </a:r>
+          </a:p>
+          <a:p>
+            <a:pPr marL="171450" indent="-171450">
+              <a:buFont typeface="Arial" panose="020B0604020202020204" pitchFamily="34" charset="0"/>
+              <a:buChar char="•"/>
+            </a:pPr>
             <a:r>
               <a:rPr lang="en-US" dirty="0"/>
-              <a:t>When the async infrastructure suspends your code at an await, it captures the current ExecutionContext. When the continuation resumes on a different thread, the captured ExecutionContext is restored. You almost never interact with it directly - it's automatic.</a:t>
-            </a:r>
-          </a:p>
-          <a:p>
+              <a:t>But ambient state - the current culture, security principal, per-request correlation IDs - needs to survive. </a:t>
+            </a:r>
+          </a:p>
+          <a:p>
+            <a:pPr marL="171450" indent="-171450">
+              <a:buFont typeface="Arial" panose="020B0604020202020204" pitchFamily="34" charset="0"/>
+              <a:buChar char="•"/>
+            </a:pPr>
+            <a:r>
+              <a:rPr lang="en-US" dirty="0" err="1"/>
+              <a:t>ExecutionContext</a:t>
+            </a:r>
             <a:r>
               <a:rPr lang="en-US" dirty="0"/>
-              <a:t>AsyncLocal&lt;T&gt; is the user-facing API built on top of ExecutionContext. Think of it as a 'logical thread-local' - a value associated with the current async flow, not any particular physical thread. The value persists across await boundaries because ExecutionContext carries it.</a:t>
-            </a:r>
-          </a:p>
-          <a:p>
+              <a:t> is an opaque container maintained by the runtime that holds all ambient data associated with the current flow of execution.</a:t>
+            </a:r>
+          </a:p>
+          <a:p>
+            <a:pPr marL="171450" indent="-171450">
+              <a:buFont typeface="Arial" panose="020B0604020202020204" pitchFamily="34" charset="0"/>
+              <a:buChar char="•"/>
+            </a:pPr>
             <a:r>
               <a:rPr lang="en-US" dirty="0"/>
-              <a:t>Copy-on-write isolation: when you fork execution with Task.Run, the child flow gets a copy of the parent's ExecutionContext. Modifications in the child don't affect the parent. This is the right behaviour for per-request correlation IDs: every spawned task inherits the ID, but can't overwrite the parent's state.</a:t>
-            </a:r>
-          </a:p>
-          <a:p>
+              <a:t>When the async infrastructure suspends your code at an await, it captures the current ExecutionContext. </a:t>
+            </a:r>
+          </a:p>
+          <a:p>
+            <a:pPr marL="171450" indent="-171450">
+              <a:buFont typeface="Arial" panose="020B0604020202020204" pitchFamily="34" charset="0"/>
+              <a:buChar char="•"/>
+            </a:pPr>
             <a:r>
               <a:rPr lang="en-US" dirty="0"/>
-              <a:t>Never use ThreadLocal&lt;T&gt; in async code. ThreadLocal is tied to the physical thread. After an await, you might be on a different thread and your value will be gone - or worse, you'll see someone else's value left over from whatever that thread was doing before. AsyncLocal&lt;T&gt; always works correctly across await boundaries.</a:t>
+              <a:t>When the continuation resumes on a different thread, the captured ExecutionContext is restored. You almost never interact with it directly - it's automatic.</a:t>
+            </a:r>
+          </a:p>
+          <a:p>
+            <a:pPr marL="171450" indent="-171450">
+              <a:buFont typeface="Arial" panose="020B0604020202020204" pitchFamily="34" charset="0"/>
+              <a:buChar char="•"/>
+            </a:pPr>
+            <a:r>
+              <a:rPr lang="en-US" dirty="0" err="1"/>
+              <a:t>AsyncLocal</a:t>
+            </a:r>
+            <a:r>
+              <a:rPr lang="en-US" dirty="0"/>
+              <a:t>&lt;T&gt; is the user-facing API built on top of ExecutionContext. Think of it as a 'logical thread-local' - a value associated with the current async flow, not any particular physical thread. </a:t>
+            </a:r>
+          </a:p>
+          <a:p>
+            <a:pPr marL="171450" indent="-171450">
+              <a:buFont typeface="Arial" panose="020B0604020202020204" pitchFamily="34" charset="0"/>
+              <a:buChar char="•"/>
+            </a:pPr>
+            <a:r>
+              <a:rPr lang="en-US" dirty="0"/>
+              <a:t>The value persists across await boundaries because ExecutionContext carries it.</a:t>
+            </a:r>
+          </a:p>
+          <a:p>
+            <a:endParaRPr lang="en-US" dirty="0"/>
+          </a:p>
+          <a:p>
+            <a:pPr marL="171450" indent="-171450">
+              <a:buFont typeface="Arial" panose="020B0604020202020204" pitchFamily="34" charset="0"/>
+              <a:buChar char="•"/>
+            </a:pPr>
+            <a:r>
+              <a:rPr lang="en-US" dirty="0"/>
+              <a:t>Copy-on-write isolation: when you fork execution with Task.Run, the child flow gets a copy of the parent's ExecutionContext. </a:t>
+            </a:r>
+          </a:p>
+          <a:p>
+            <a:pPr marL="171450" indent="-171450">
+              <a:buFont typeface="Arial" panose="020B0604020202020204" pitchFamily="34" charset="0"/>
+              <a:buChar char="•"/>
+            </a:pPr>
+            <a:r>
+              <a:rPr lang="en-US" dirty="0"/>
+              <a:t>Modifications in the child don't affect the parent. </a:t>
+            </a:r>
+          </a:p>
+          <a:p>
+            <a:pPr marL="171450" indent="-171450">
+              <a:buFont typeface="Arial" panose="020B0604020202020204" pitchFamily="34" charset="0"/>
+              <a:buChar char="•"/>
+            </a:pPr>
+            <a:r>
+              <a:rPr lang="en-US" dirty="0"/>
+              <a:t>This is the right behaviour for per-request correlation IDs: every spawned task inherits the ID, but can't overwrite the parent's state.</a:t>
+            </a:r>
+          </a:p>
+          <a:p>
+            <a:pPr marL="171450" indent="-171450">
+              <a:buFont typeface="Arial" panose="020B0604020202020204" pitchFamily="34" charset="0"/>
+              <a:buChar char="•"/>
+            </a:pPr>
+            <a:r>
+              <a:rPr lang="en-US" dirty="0"/>
+              <a:t>Note:</a:t>
+            </a:r>
+          </a:p>
+          <a:p>
+            <a:pPr marL="628650" lvl="1" indent="-171450">
+              <a:buFont typeface="Arial" panose="020B0604020202020204" pitchFamily="34" charset="0"/>
+              <a:buChar char="•"/>
+            </a:pPr>
+            <a:r>
+              <a:rPr lang="en-US" dirty="0"/>
+              <a:t>Never use ThreadLocal&lt;T&gt; in async code. </a:t>
+            </a:r>
+          </a:p>
+          <a:p>
+            <a:pPr marL="628650" lvl="1" indent="-171450">
+              <a:buFont typeface="Arial" panose="020B0604020202020204" pitchFamily="34" charset="0"/>
+              <a:buChar char="•"/>
+            </a:pPr>
+            <a:r>
+              <a:rPr lang="en-US" dirty="0" err="1"/>
+              <a:t>ThreadLocal</a:t>
+            </a:r>
+            <a:r>
+              <a:rPr lang="en-US" dirty="0"/>
+              <a:t> is tied to the physical thread.</a:t>
+            </a:r>
+          </a:p>
+          <a:p>
+            <a:pPr marL="628650" lvl="1" indent="-171450">
+              <a:buFont typeface="Arial" panose="020B0604020202020204" pitchFamily="34" charset="0"/>
+              <a:buChar char="•"/>
+            </a:pPr>
+            <a:r>
+              <a:rPr lang="en-US" dirty="0"/>
+              <a:t>After an await, you might be on a different thread and your value will be gone - or worse, you'll see someone else's value left over from whatever that thread was doing before.</a:t>
+            </a:r>
+          </a:p>
+          <a:p>
+            <a:pPr marL="628650" lvl="1" indent="-171450">
+              <a:buFont typeface="Arial" panose="020B0604020202020204" pitchFamily="34" charset="0"/>
+              <a:buChar char="•"/>
+            </a:pPr>
+            <a:r>
+              <a:rPr lang="en-US" dirty="0"/>
+              <a:t> AsyncLocal&lt;T&gt; always works correctly across await boundaries.</a:t>
             </a:r>
           </a:p>
         </p:txBody>
@@ -3401,51 +3829,19 @@
           <a:p>
             <a:r>
               <a:rPr lang="en-US" dirty="0"/>
-              <a:t>When the continuation </a:t>
-            </a:r>
-            <a:r>
-              <a:rPr lang="en-US"/>
-              <a:t>resumes - </a:t>
-            </a:r>
+              <a:t>When the continuation resumes - possibly on a different thread - the captured ExecutionContext is restored before your code runs. You almost never interact with ExecutionContext directly. It's automatic.</a:t>
+            </a:r>
+          </a:p>
+          <a:p>
             <a:r>
               <a:rPr lang="en-US" dirty="0"/>
-              <a:t>possibly on a different </a:t>
-            </a:r>
-            <a:r>
-              <a:rPr lang="en-US"/>
-              <a:t>thread - </a:t>
-            </a:r>
+              <a:t>What flows inside it? The security context, the call context, the current culture, and any AsyncLocal&lt;T&gt; values. AsyncLocal&lt;T&gt; is a 'logical thread-local' - a value associated with the current async flow, not any particular physical thread. The value persists across the await because ExecutionContext was captured (carrying the AsyncLocal data) and restored on the other side.</a:t>
+            </a:r>
+          </a:p>
+          <a:p>
             <a:r>
               <a:rPr lang="en-US" dirty="0"/>
-              <a:t>the captured ExecutionContext is restored before your code runs. You almost never interact with ExecutionContext directly. It's automatic.</a:t>
-            </a:r>
-          </a:p>
-          <a:p>
-            <a:r>
-              <a:rPr lang="en-US" dirty="0"/>
-              <a:t>What flows inside it? The security context, the call context, the current culture, and any AsyncLocal&lt;T&gt; values. AsyncLocal&lt;T&gt; is a 'logical thread-local</a:t>
-            </a:r>
-            <a:r>
-              <a:rPr lang="en-US"/>
-              <a:t>' - </a:t>
-            </a:r>
-            <a:r>
-              <a:rPr lang="en-US" dirty="0"/>
-              <a:t>a value associated with the current async flow, not any particular physical thread. The value persists across the await because ExecutionContext was captured (carrying the AsyncLocal data) and restored on the other side.</a:t>
-            </a:r>
-          </a:p>
-          <a:p>
-            <a:r>
-              <a:rPr lang="en-US" dirty="0"/>
-              <a:t>It doesn't matter that the thread </a:t>
-            </a:r>
-            <a:r>
-              <a:rPr lang="en-US"/>
-              <a:t>changed - </a:t>
-            </a:r>
-            <a:r>
-              <a:rPr lang="en-US" dirty="0"/>
-              <a:t>the logical context was preserved.</a:t>
+              <a:t>It doesn't matter that the thread changed - the logical context was preserved.</a:t>
             </a:r>
           </a:p>
         </p:txBody>
@@ -5453,427 +5849,6 @@
       </p:sp>
       <p:sp>
         <p:nvSpPr>
-          <p:cNvPr id="3" name="Shape 1"/>
-          <p:cNvSpPr/>
-          <p:nvPr/>
-        </p:nvSpPr>
-        <p:spPr>
-          <a:xfrm>
-            <a:off x="457200" y="1005839"/>
-            <a:ext cx="6858000" cy="3097717"/>
-          </a:xfrm>
-          <a:prstGeom prst="rect">
-            <a:avLst/>
-          </a:prstGeom>
-          <a:solidFill>
-            <a:srgbClr val="1E293B"/>
-          </a:solidFill>
-          <a:ln/>
-          <a:effectLst>
-            <a:outerShdw blurRad="101600" dist="38100" dir="8100000" algn="bl" rotWithShape="0">
-              <a:srgbClr val="000000">
-                <a:alpha val="30000"/>
-              </a:srgbClr>
-            </a:outerShdw>
-          </a:effectLst>
-        </p:spPr>
-        <p:txBody>
-          <a:bodyPr/>
-          <a:lstStyle/>
-          <a:p>
-            <a:endParaRPr lang="en-US"/>
-          </a:p>
-        </p:txBody>
-      </p:sp>
-      <p:sp>
-        <p:nvSpPr>
-          <p:cNvPr id="4" name="Text 2"/>
-          <p:cNvSpPr/>
-          <p:nvPr/>
-        </p:nvSpPr>
-        <p:spPr>
-          <a:xfrm>
-            <a:off x="594360" y="1097280"/>
-            <a:ext cx="6583680" cy="2743200"/>
-          </a:xfrm>
-          <a:prstGeom prst="rect">
-            <a:avLst/>
-          </a:prstGeom>
-          <a:noFill/>
-          <a:ln/>
-        </p:spPr>
-        <p:txBody>
-          <a:bodyPr wrap="square" lIns="0" tIns="0" rIns="0" bIns="0" rtlCol="0" anchor="t"/>
-          <a:lstStyle/>
-          <a:p>
-            <a:pPr marL="0" indent="0">
-              <a:spcAft>
-                <a:spcPts val="200"/>
-              </a:spcAft>
-              <a:buNone/>
-            </a:pPr>
-            <a:r>
-              <a:rPr lang="en-US" sz="1150" dirty="0">
-                <a:solidFill>
-                  <a:srgbClr val="E2E8F0"/>
-                </a:solidFill>
-                <a:latin typeface="Consolas" pitchFamily="34" charset="0"/>
-                <a:ea typeface="Consolas" pitchFamily="34" charset="-122"/>
-                <a:cs typeface="Consolas" pitchFamily="34" charset="-120"/>
-              </a:rPr>
-              <a:t>struct MyDelayAwaitable</a:t>
-            </a:r>
-            <a:endParaRPr lang="en-US" sz="1150" dirty="0"/>
-          </a:p>
-          <a:p>
-            <a:pPr marL="0" indent="0">
-              <a:spcAft>
-                <a:spcPts val="200"/>
-              </a:spcAft>
-              <a:buNone/>
-            </a:pPr>
-            <a:r>
-              <a:rPr lang="en-US" sz="1150" dirty="0">
-                <a:solidFill>
-                  <a:srgbClr val="E2E8F0"/>
-                </a:solidFill>
-                <a:latin typeface="Consolas" pitchFamily="34" charset="0"/>
-                <a:ea typeface="Consolas" pitchFamily="34" charset="-122"/>
-                <a:cs typeface="Consolas" pitchFamily="34" charset="-120"/>
-              </a:rPr>
-              <a:t>{</a:t>
-            </a:r>
-            <a:endParaRPr lang="en-US" sz="1150" dirty="0"/>
-          </a:p>
-          <a:p>
-            <a:pPr marL="0" indent="0">
-              <a:spcAft>
-                <a:spcPts val="200"/>
-              </a:spcAft>
-              <a:buNone/>
-            </a:pPr>
-            <a:r>
-              <a:rPr lang="en-US" sz="1150" dirty="0">
-                <a:solidFill>
-                  <a:srgbClr val="E2E8F0"/>
-                </a:solidFill>
-                <a:latin typeface="Consolas" pitchFamily="34" charset="0"/>
-                <a:ea typeface="Consolas" pitchFamily="34" charset="-122"/>
-                <a:cs typeface="Consolas" pitchFamily="34" charset="-120"/>
-              </a:rPr>
-              <a:t>    private readonly int _ms;</a:t>
-            </a:r>
-            <a:endParaRPr lang="en-US" sz="1150" dirty="0"/>
-          </a:p>
-          <a:p>
-            <a:pPr marL="0" indent="0">
-              <a:spcAft>
-                <a:spcPts val="200"/>
-              </a:spcAft>
-              <a:buNone/>
-            </a:pPr>
-            <a:r>
-              <a:rPr lang="en-US" sz="1150" dirty="0">
-                <a:solidFill>
-                  <a:srgbClr val="E2E8F0"/>
-                </a:solidFill>
-                <a:latin typeface="Consolas" pitchFamily="34" charset="0"/>
-                <a:ea typeface="Consolas" pitchFamily="34" charset="-122"/>
-                <a:cs typeface="Consolas" pitchFamily="34" charset="-120"/>
-              </a:rPr>
-              <a:t>    public MyDelayAwaitable(int ms) =&gt; _ms = ms;</a:t>
-            </a:r>
-            <a:endParaRPr lang="en-US" sz="1150" dirty="0"/>
-          </a:p>
-          <a:p>
-            <a:pPr marL="0" indent="0">
-              <a:spcAft>
-                <a:spcPts val="200"/>
-              </a:spcAft>
-              <a:buNone/>
-            </a:pPr>
-            <a:r>
-              <a:rPr lang="en-US" sz="1150" dirty="0">
-                <a:solidFill>
-                  <a:srgbClr val="E2E8F0"/>
-                </a:solidFill>
-                <a:latin typeface="Consolas" pitchFamily="34" charset="0"/>
-                <a:ea typeface="Consolas" pitchFamily="34" charset="-122"/>
-                <a:cs typeface="Consolas" pitchFamily="34" charset="-120"/>
-              </a:rPr>
-              <a:t>    public MyDelayAwaiter GetAwaiter() =&gt; new MyDelayAwaiter(_ms);</a:t>
-            </a:r>
-            <a:endParaRPr lang="en-US" sz="1150" dirty="0"/>
-          </a:p>
-          <a:p>
-            <a:pPr marL="0" indent="0">
-              <a:spcAft>
-                <a:spcPts val="200"/>
-              </a:spcAft>
-              <a:buNone/>
-            </a:pPr>
-            <a:r>
-              <a:rPr lang="en-US" sz="1150" dirty="0">
-                <a:solidFill>
-                  <a:srgbClr val="E2E8F0"/>
-                </a:solidFill>
-                <a:latin typeface="Consolas" pitchFamily="34" charset="0"/>
-                <a:ea typeface="Consolas" pitchFamily="34" charset="-122"/>
-                <a:cs typeface="Consolas" pitchFamily="34" charset="-120"/>
-              </a:rPr>
-              <a:t>}</a:t>
-            </a:r>
-            <a:endParaRPr lang="en-US" sz="1150" dirty="0"/>
-          </a:p>
-          <a:p>
-            <a:pPr marL="0" indent="0">
-              <a:spcAft>
-                <a:spcPts val="200"/>
-              </a:spcAft>
-              <a:buNone/>
-            </a:pPr>
-            <a:endParaRPr lang="en-US" sz="1150" dirty="0"/>
-          </a:p>
-          <a:p>
-            <a:pPr marL="0" indent="0">
-              <a:spcAft>
-                <a:spcPts val="200"/>
-              </a:spcAft>
-              <a:buNone/>
-            </a:pPr>
-            <a:r>
-              <a:rPr lang="en-US" sz="1150" dirty="0">
-                <a:solidFill>
-                  <a:srgbClr val="E2E8F0"/>
-                </a:solidFill>
-                <a:latin typeface="Consolas" pitchFamily="34" charset="0"/>
-                <a:ea typeface="Consolas" pitchFamily="34" charset="-122"/>
-                <a:cs typeface="Consolas" pitchFamily="34" charset="-120"/>
-              </a:rPr>
-              <a:t>struct MyDelayAwaiter : INotifyCompletion</a:t>
-            </a:r>
-            <a:endParaRPr lang="en-US" sz="1150" dirty="0"/>
-          </a:p>
-          <a:p>
-            <a:pPr marL="0" indent="0">
-              <a:spcAft>
-                <a:spcPts val="200"/>
-              </a:spcAft>
-              <a:buNone/>
-            </a:pPr>
-            <a:r>
-              <a:rPr lang="en-US" sz="1150" dirty="0">
-                <a:solidFill>
-                  <a:srgbClr val="E2E8F0"/>
-                </a:solidFill>
-                <a:latin typeface="Consolas" pitchFamily="34" charset="0"/>
-                <a:ea typeface="Consolas" pitchFamily="34" charset="-122"/>
-                <a:cs typeface="Consolas" pitchFamily="34" charset="-120"/>
-              </a:rPr>
-              <a:t>{</a:t>
-            </a:r>
-            <a:endParaRPr lang="en-US" sz="1150" dirty="0"/>
-          </a:p>
-          <a:p>
-            <a:pPr marL="0" indent="0">
-              <a:spcAft>
-                <a:spcPts val="200"/>
-              </a:spcAft>
-              <a:buNone/>
-            </a:pPr>
-            <a:r>
-              <a:rPr lang="en-US" sz="1150" dirty="0">
-                <a:solidFill>
-                  <a:srgbClr val="E2E8F0"/>
-                </a:solidFill>
-                <a:latin typeface="Consolas" pitchFamily="34" charset="0"/>
-                <a:ea typeface="Consolas" pitchFamily="34" charset="-122"/>
-                <a:cs typeface="Consolas" pitchFamily="34" charset="-120"/>
-              </a:rPr>
-              <a:t>    private readonly Task _task;</a:t>
-            </a:r>
-            <a:endParaRPr lang="en-US" sz="1150" dirty="0"/>
-          </a:p>
-          <a:p>
-            <a:pPr marL="0" indent="0">
-              <a:spcAft>
-                <a:spcPts val="200"/>
-              </a:spcAft>
-              <a:buNone/>
-            </a:pPr>
-            <a:r>
-              <a:rPr lang="en-US" sz="1150" dirty="0">
-                <a:solidFill>
-                  <a:srgbClr val="E2E8F0"/>
-                </a:solidFill>
-                <a:latin typeface="Consolas" pitchFamily="34" charset="0"/>
-                <a:ea typeface="Consolas" pitchFamily="34" charset="-122"/>
-                <a:cs typeface="Consolas" pitchFamily="34" charset="-120"/>
-              </a:rPr>
-              <a:t>    public MyDelayAwaiter(int ms) =&gt; _task = Task.Delay(ms);</a:t>
-            </a:r>
-            <a:endParaRPr lang="en-US" sz="1150" dirty="0"/>
-          </a:p>
-          <a:p>
-            <a:pPr marL="0" indent="0">
-              <a:spcAft>
-                <a:spcPts val="200"/>
-              </a:spcAft>
-              <a:buNone/>
-            </a:pPr>
-            <a:r>
-              <a:rPr lang="en-US" sz="1150" dirty="0">
-                <a:solidFill>
-                  <a:srgbClr val="E2E8F0"/>
-                </a:solidFill>
-                <a:latin typeface="Consolas" pitchFamily="34" charset="0"/>
-                <a:ea typeface="Consolas" pitchFamily="34" charset="-122"/>
-                <a:cs typeface="Consolas" pitchFamily="34" charset="-120"/>
-              </a:rPr>
-              <a:t>    public bool IsCompleted =&gt; _task.IsCompleted;</a:t>
-            </a:r>
-            <a:endParaRPr lang="en-US" sz="1150" dirty="0"/>
-          </a:p>
-          <a:p>
-            <a:pPr marL="0" indent="0">
-              <a:spcAft>
-                <a:spcPts val="200"/>
-              </a:spcAft>
-              <a:buNone/>
-            </a:pPr>
-            <a:r>
-              <a:rPr lang="en-US" sz="1150" dirty="0">
-                <a:solidFill>
-                  <a:srgbClr val="E2E8F0"/>
-                </a:solidFill>
-                <a:latin typeface="Consolas" pitchFamily="34" charset="0"/>
-                <a:ea typeface="Consolas" pitchFamily="34" charset="-122"/>
-                <a:cs typeface="Consolas" pitchFamily="34" charset="-120"/>
-              </a:rPr>
-              <a:t>    public void OnCompleted(Action c) =&gt; _task.GetAwaiter().OnCompleted(c);</a:t>
-            </a:r>
-            <a:endParaRPr lang="en-US" sz="1150" dirty="0"/>
-          </a:p>
-          <a:p>
-            <a:pPr marL="0" indent="0">
-              <a:spcAft>
-                <a:spcPts val="200"/>
-              </a:spcAft>
-              <a:buNone/>
-            </a:pPr>
-            <a:r>
-              <a:rPr lang="en-US" sz="1150" dirty="0">
-                <a:solidFill>
-                  <a:srgbClr val="E2E8F0"/>
-                </a:solidFill>
-                <a:latin typeface="Consolas" pitchFamily="34" charset="0"/>
-                <a:ea typeface="Consolas" pitchFamily="34" charset="-122"/>
-                <a:cs typeface="Consolas" pitchFamily="34" charset="-120"/>
-              </a:rPr>
-              <a:t>    public void GetResult() =&gt; _task.GetAwaiter().GetResult();</a:t>
-            </a:r>
-            <a:endParaRPr lang="en-US" sz="1150" dirty="0"/>
-          </a:p>
-          <a:p>
-            <a:pPr marL="0" indent="0">
-              <a:spcAft>
-                <a:spcPts val="200"/>
-              </a:spcAft>
-              <a:buNone/>
-            </a:pPr>
-            <a:r>
-              <a:rPr lang="en-US" sz="1150" dirty="0">
-                <a:solidFill>
-                  <a:srgbClr val="E2E8F0"/>
-                </a:solidFill>
-                <a:latin typeface="Consolas" pitchFamily="34" charset="0"/>
-                <a:ea typeface="Consolas" pitchFamily="34" charset="-122"/>
-                <a:cs typeface="Consolas" pitchFamily="34" charset="-120"/>
-              </a:rPr>
-              <a:t>}</a:t>
-            </a:r>
-            <a:endParaRPr lang="en-US" sz="1150" dirty="0"/>
-          </a:p>
-        </p:txBody>
-      </p:sp>
-      <p:sp>
-        <p:nvSpPr>
-          <p:cNvPr id="5" name="Shape 3"/>
-          <p:cNvSpPr/>
-          <p:nvPr/>
-        </p:nvSpPr>
-        <p:spPr>
-          <a:xfrm>
-            <a:off x="457200" y="4159021"/>
-            <a:ext cx="5029200" cy="502920"/>
-          </a:xfrm>
-          <a:prstGeom prst="rect">
-            <a:avLst/>
-          </a:prstGeom>
-          <a:solidFill>
-            <a:srgbClr val="1E293B"/>
-          </a:solidFill>
-          <a:ln/>
-          <a:effectLst>
-            <a:outerShdw blurRad="101600" dist="38100" dir="8100000" algn="bl" rotWithShape="0">
-              <a:srgbClr val="000000">
-                <a:alpha val="30000"/>
-              </a:srgbClr>
-            </a:outerShdw>
-          </a:effectLst>
-        </p:spPr>
-        <p:txBody>
-          <a:bodyPr/>
-          <a:lstStyle/>
-          <a:p>
-            <a:endParaRPr lang="en-US"/>
-          </a:p>
-        </p:txBody>
-      </p:sp>
-      <p:sp>
-        <p:nvSpPr>
-          <p:cNvPr id="6" name="Text 4"/>
-          <p:cNvSpPr/>
-          <p:nvPr/>
-        </p:nvSpPr>
-        <p:spPr>
-          <a:xfrm>
-            <a:off x="594360" y="4250461"/>
-            <a:ext cx="4754880" cy="320040"/>
-          </a:xfrm>
-          <a:prstGeom prst="rect">
-            <a:avLst/>
-          </a:prstGeom>
-          <a:noFill/>
-          <a:ln/>
-        </p:spPr>
-        <p:txBody>
-          <a:bodyPr wrap="square" lIns="0" tIns="0" rIns="0" bIns="0" rtlCol="0" anchor="t"/>
-          <a:lstStyle/>
-          <a:p>
-            <a:pPr marL="0" indent="0">
-              <a:spcAft>
-                <a:spcPts val="200"/>
-              </a:spcAft>
-              <a:buNone/>
-            </a:pPr>
-            <a:r>
-              <a:rPr lang="en-US" sz="1200" dirty="0">
-                <a:solidFill>
-                  <a:srgbClr val="E2E8F0"/>
-                </a:solidFill>
-                <a:latin typeface="Consolas" pitchFamily="34" charset="0"/>
-                <a:ea typeface="Consolas" pitchFamily="34" charset="-122"/>
-                <a:cs typeface="Consolas" pitchFamily="34" charset="-120"/>
-              </a:rPr>
-              <a:t>await new MyDelayAwaitable(1000);  // This works!</a:t>
-            </a:r>
-            <a:endParaRPr lang="en-US" sz="1200" dirty="0"/>
-          </a:p>
-        </p:txBody>
-      </p:sp>
-      <p:sp>
-        <p:nvSpPr>
           <p:cNvPr id="7" name="Text 5"/>
           <p:cNvSpPr/>
           <p:nvPr/>
@@ -8114,6 +8089,15 @@
               <a:rPr lang="en-GB" dirty="0"/>
               <a:t>/// show actual state machine</a:t>
             </a:r>
+            <a:br>
+              <a:rPr lang="en-GB" dirty="0"/>
+            </a:br>
+            <a:r>
+              <a:rPr lang="en-US" dirty="0" err="1">
+                <a:hlinkClick r:id="rId3"/>
+              </a:rPr>
+              <a:t>SharpLab</a:t>
+            </a:r>
             <a:endParaRPr lang="en-US" dirty="0"/>
           </a:p>
         </p:txBody>
@@ -8389,10 +8373,12 @@
               </a:spcAft>
             </a:pPr>
             <a:r>
-              <a:rPr lang="en-GB" sz="600" dirty="0"/>
-              <a:t>///show actual state machine</a:t>
-            </a:r>
-            <a:endParaRPr lang="en-US" sz="600" dirty="0"/>
+              <a:rPr lang="en-US" dirty="0" err="1">
+                <a:hlinkClick r:id="rId3"/>
+              </a:rPr>
+              <a:t>SharpLab</a:t>
+            </a:r>
+            <a:endParaRPr lang="en-US" dirty="0"/>
           </a:p>
         </p:txBody>
       </p:sp>
@@ -9118,202 +9104,16 @@
           <a:bodyPr wrap="square" lIns="0" tIns="0" rIns="0" bIns="0" rtlCol="0" anchor="t"/>
           <a:lstStyle/>
           <a:p>
-            <a:pPr marL="0" indent="0">
+            <a:pPr>
               <a:spcAft>
                 <a:spcPts val="200"/>
               </a:spcAft>
-              <a:buNone/>
-            </a:pPr>
-            <a:r>
-              <a:rPr lang="en-US" sz="1200" dirty="0">
-                <a:solidFill>
-                  <a:srgbClr val="E2E8F0"/>
-                </a:solidFill>
-                <a:latin typeface="Consolas" pitchFamily="34" charset="0"/>
-                <a:ea typeface="Consolas" pitchFamily="34" charset="-122"/>
-                <a:cs typeface="Consolas" pitchFamily="34" charset="-120"/>
-              </a:rPr>
-              <a:t>    } // end try</a:t>
-            </a:r>
-            <a:endParaRPr lang="en-US" sz="1200" dirty="0"/>
-          </a:p>
-          <a:p>
-            <a:pPr marL="0" indent="0">
-              <a:spcAft>
-                <a:spcPts val="200"/>
-              </a:spcAft>
-              <a:buNone/>
-            </a:pPr>
-            <a:r>
-              <a:rPr lang="en-US" sz="1200" dirty="0">
-                <a:solidFill>
-                  <a:srgbClr val="E2E8F0"/>
-                </a:solidFill>
-                <a:latin typeface="Consolas" pitchFamily="34" charset="0"/>
-                <a:ea typeface="Consolas" pitchFamily="34" charset="-122"/>
-                <a:cs typeface="Consolas" pitchFamily="34" charset="-120"/>
-              </a:rPr>
-              <a:t>    catch (Exception ex)</a:t>
-            </a:r>
-            <a:endParaRPr lang="en-US" sz="1200" dirty="0"/>
-          </a:p>
-          <a:p>
-            <a:pPr marL="0" indent="0">
-              <a:spcAft>
-                <a:spcPts val="200"/>
-              </a:spcAft>
-              <a:buNone/>
-            </a:pPr>
-            <a:r>
-              <a:rPr lang="en-US" sz="1200" dirty="0">
-                <a:solidFill>
-                  <a:srgbClr val="E2E8F0"/>
-                </a:solidFill>
-                <a:latin typeface="Consolas" pitchFamily="34" charset="0"/>
-                <a:ea typeface="Consolas" pitchFamily="34" charset="-122"/>
-                <a:cs typeface="Consolas" pitchFamily="34" charset="-120"/>
-              </a:rPr>
-              <a:t>    {</a:t>
-            </a:r>
-            <a:endParaRPr lang="en-US" sz="1200" dirty="0"/>
-          </a:p>
-          <a:p>
-            <a:pPr marL="0" indent="0">
-              <a:spcAft>
-                <a:spcPts val="200"/>
-              </a:spcAft>
-              <a:buNone/>
-            </a:pPr>
-            <a:r>
-              <a:rPr lang="en-US" sz="1200" dirty="0">
-                <a:solidFill>
-                  <a:srgbClr val="E2E8F0"/>
-                </a:solidFill>
-                <a:latin typeface="Consolas" pitchFamily="34" charset="0"/>
-                <a:ea typeface="Consolas" pitchFamily="34" charset="-122"/>
-                <a:cs typeface="Consolas" pitchFamily="34" charset="-120"/>
-              </a:rPr>
-              <a:t>        &lt;&gt;1__state = -2;               // Terminal state</a:t>
-            </a:r>
-            <a:endParaRPr lang="en-US" sz="1200" dirty="0"/>
-          </a:p>
-          <a:p>
-            <a:pPr marL="0" indent="0">
-              <a:spcAft>
-                <a:spcPts val="200"/>
-              </a:spcAft>
-              <a:buNone/>
-            </a:pPr>
-            <a:r>
-              <a:rPr lang="en-US" sz="1200" dirty="0">
-                <a:solidFill>
-                  <a:srgbClr val="E2E8F0"/>
-                </a:solidFill>
-                <a:latin typeface="Consolas" pitchFamily="34" charset="0"/>
-                <a:ea typeface="Consolas" pitchFamily="34" charset="-122"/>
-                <a:cs typeface="Consolas" pitchFamily="34" charset="-120"/>
-              </a:rPr>
-              <a:t>        &lt;&gt;t__builder.SetException(ex); // Faults the outer Task</a:t>
-            </a:r>
-            <a:endParaRPr lang="en-US" sz="1200" dirty="0"/>
-          </a:p>
-          <a:p>
-            <a:pPr marL="0" indent="0">
-              <a:spcAft>
-                <a:spcPts val="200"/>
-              </a:spcAft>
-              <a:buNone/>
-            </a:pPr>
-            <a:r>
-              <a:rPr lang="en-US" sz="1200" dirty="0">
-                <a:solidFill>
-                  <a:srgbClr val="E2E8F0"/>
-                </a:solidFill>
-                <a:latin typeface="Consolas" pitchFamily="34" charset="0"/>
-                <a:ea typeface="Consolas" pitchFamily="34" charset="-122"/>
-                <a:cs typeface="Consolas" pitchFamily="34" charset="-120"/>
-              </a:rPr>
-              <a:t>        return;</a:t>
-            </a:r>
-            <a:endParaRPr lang="en-US" sz="1200" dirty="0"/>
-          </a:p>
-          <a:p>
-            <a:pPr marL="0" indent="0">
-              <a:spcAft>
-                <a:spcPts val="200"/>
-              </a:spcAft>
-              <a:buNone/>
-            </a:pPr>
-            <a:r>
-              <a:rPr lang="en-US" sz="1200" dirty="0">
-                <a:solidFill>
-                  <a:srgbClr val="E2E8F0"/>
-                </a:solidFill>
-                <a:latin typeface="Consolas" pitchFamily="34" charset="0"/>
-                <a:ea typeface="Consolas" pitchFamily="34" charset="-122"/>
-                <a:cs typeface="Consolas" pitchFamily="34" charset="-120"/>
-              </a:rPr>
-              <a:t>    }</a:t>
-            </a:r>
-            <a:endParaRPr lang="en-US" sz="1200" dirty="0"/>
-          </a:p>
-          <a:p>
-            <a:pPr marL="0" indent="0">
-              <a:spcAft>
-                <a:spcPts val="200"/>
-              </a:spcAft>
-              <a:buNone/>
-            </a:pPr>
-            <a:r>
-              <a:rPr lang="en-US" sz="1200" dirty="0">
-                <a:solidFill>
-                  <a:srgbClr val="E2E8F0"/>
-                </a:solidFill>
-                <a:latin typeface="Consolas" pitchFamily="34" charset="0"/>
-                <a:ea typeface="Consolas" pitchFamily="34" charset="-122"/>
-                <a:cs typeface="Consolas" pitchFamily="34" charset="-120"/>
-              </a:rPr>
-              <a:t>    &lt;&gt;1__state = -2;                   // Terminal state</a:t>
-            </a:r>
-            <a:endParaRPr lang="en-US" sz="1200" dirty="0"/>
-          </a:p>
-          <a:p>
-            <a:pPr marL="0" indent="0">
-              <a:spcAft>
-                <a:spcPts val="200"/>
-              </a:spcAft>
-              <a:buNone/>
-            </a:pPr>
-            <a:r>
-              <a:rPr lang="en-US" sz="1200" dirty="0">
-                <a:solidFill>
-                  <a:srgbClr val="E2E8F0"/>
-                </a:solidFill>
-                <a:latin typeface="Consolas" pitchFamily="34" charset="0"/>
-                <a:ea typeface="Consolas" pitchFamily="34" charset="-122"/>
-                <a:cs typeface="Consolas" pitchFamily="34" charset="-120"/>
-              </a:rPr>
-              <a:t>    &lt;&gt;t__builder.SetResult();          // Completes the outer Task</a:t>
-            </a:r>
-            <a:endParaRPr lang="en-US" sz="1200" dirty="0"/>
-          </a:p>
-          <a:p>
-            <a:pPr marL="0" indent="0">
-              <a:spcAft>
-                <a:spcPts val="200"/>
-              </a:spcAft>
-              <a:buNone/>
-            </a:pPr>
-            <a:r>
-              <a:rPr lang="en-US" sz="1200" dirty="0">
-                <a:solidFill>
-                  <a:srgbClr val="E2E8F0"/>
-                </a:solidFill>
-                <a:latin typeface="Consolas" pitchFamily="34" charset="0"/>
-                <a:ea typeface="Consolas" pitchFamily="34" charset="-122"/>
-                <a:cs typeface="Consolas" pitchFamily="34" charset="-120"/>
-              </a:rPr>
-              <a:t>}</a:t>
+            </a:pPr>
+            <a:r>
+              <a:rPr lang="en-US" sz="1200" dirty="0" err="1">
+                <a:hlinkClick r:id="rId3"/>
+              </a:rPr>
+              <a:t>SharpLab</a:t>
             </a:r>
             <a:endParaRPr lang="en-US" sz="1200" dirty="0"/>
           </a:p>
@@ -10836,7 +10636,7 @@
         </p:nvSpPr>
         <p:spPr>
           <a:xfrm>
-            <a:off x="457200" y="4206240"/>
+            <a:off x="457200" y="4379348"/>
             <a:ext cx="8229600" cy="640080"/>
           </a:xfrm>
           <a:prstGeom prst="rect">
@@ -10863,7 +10663,7 @@
         </p:nvSpPr>
         <p:spPr>
           <a:xfrm>
-            <a:off x="457200" y="4206240"/>
+            <a:off x="457200" y="4379348"/>
             <a:ext cx="73152" cy="640080"/>
           </a:xfrm>
           <a:prstGeom prst="rect">
@@ -10890,7 +10690,7 @@
         </p:nvSpPr>
         <p:spPr>
           <a:xfrm>
-            <a:off x="777240" y="4206240"/>
+            <a:off x="777240" y="4379348"/>
             <a:ext cx="7772400" cy="640080"/>
           </a:xfrm>
           <a:prstGeom prst="rect">
@@ -14224,40 +14024,6 @@
       </p:sp>
       <p:sp>
         <p:nvSpPr>
-          <p:cNvPr id="30" name="CodeBg"/>
-          <p:cNvSpPr/>
-          <p:nvPr/>
-        </p:nvSpPr>
-        <p:spPr>
-          <a:xfrm>
-            <a:off x="457200" y="1005840"/>
-            <a:ext cx="5486400" cy="3474720"/>
-          </a:xfrm>
-          <a:prstGeom prst="rect">
-            <a:avLst/>
-          </a:prstGeom>
-          <a:solidFill>
-            <a:srgbClr val="1E293B"/>
-          </a:solidFill>
-          <a:ln/>
-          <a:effectLst>
-            <a:outerShdw blurRad="101600" dist="38100" dir="8100000" algn="bl" rotWithShape="0">
-              <a:srgbClr val="000000">
-                <a:alpha val="30000"/>
-              </a:srgbClr>
-            </a:outerShdw>
-          </a:effectLst>
-        </p:spPr>
-        <p:txBody>
-          <a:bodyPr/>
-          <a:lstStyle/>
-          <a:p>
-            <a:endParaRPr lang="en-US"/>
-          </a:p>
-        </p:txBody>
-      </p:sp>
-      <p:sp>
-        <p:nvSpPr>
           <p:cNvPr id="3" name="Code"/>
           <p:cNvSpPr/>
           <p:nvPr/>
@@ -14276,40 +14042,6 @@
         <p:txBody>
           <a:bodyPr wrap="square" lIns="0" tIns="0" rIns="0" bIns="0" rtlCol="0" anchor="t"/>
           <a:lstStyle/>
-          <a:p>
-            <a:pPr marL="0" indent="0">
-              <a:spcAft>
-                <a:spcPts val="200"/>
-              </a:spcAft>
-              <a:buNone/>
-            </a:pPr>
-            <a:r>
-              <a:rPr lang="en-US" sz="1100" dirty="0">
-                <a:solidFill>
-                  <a:srgbClr val="E2E8F0"/>
-                </a:solidFill>
-                <a:latin typeface="Consolas" pitchFamily="34" charset="0"/>
-              </a:rPr>
-              <a:t>// Task&lt;T&gt;: always allocates a heap object</a:t>
-            </a:r>
-          </a:p>
-          <a:p>
-            <a:pPr marL="0" indent="0">
-              <a:spcAft>
-                <a:spcPts val="200"/>
-              </a:spcAft>
-              <a:buNone/>
-            </a:pPr>
-            <a:r>
-              <a:rPr lang="en-US" sz="1100" dirty="0">
-                <a:solidFill>
-                  <a:srgbClr val="E2E8F0"/>
-                </a:solidFill>
-                <a:latin typeface="Consolas" pitchFamily="34" charset="0"/>
-              </a:rPr>
-              <a:t>async Task&lt;int&gt; GetValue() =&gt; await FetchAsync();</a:t>
-            </a:r>
-          </a:p>
           <a:p>
             <a:pPr marL="0" indent="0">
               <a:spcAft>
@@ -14324,190 +14056,6 @@
               <a:latin typeface="Consolas" pitchFamily="34" charset="0"/>
             </a:endParaRPr>
           </a:p>
-          <a:p>
-            <a:pPr marL="0" indent="0">
-              <a:spcAft>
-                <a:spcPts val="200"/>
-              </a:spcAft>
-              <a:buNone/>
-            </a:pPr>
-            <a:r>
-              <a:rPr lang="en-US" sz="1100" dirty="0">
-                <a:solidFill>
-                  <a:srgbClr val="E2E8F0"/>
-                </a:solidFill>
-                <a:latin typeface="Consolas" pitchFamily="34" charset="0"/>
-              </a:rPr>
-              <a:t>// ValueTask&lt;T&gt;: struct - zero allocation if result is already ready</a:t>
-            </a:r>
-          </a:p>
-          <a:p>
-            <a:pPr marL="0" indent="0">
-              <a:spcAft>
-                <a:spcPts val="200"/>
-              </a:spcAft>
-              <a:buNone/>
-            </a:pPr>
-            <a:r>
-              <a:rPr lang="en-US" sz="1100" dirty="0">
-                <a:solidFill>
-                  <a:srgbClr val="E2E8F0"/>
-                </a:solidFill>
-                <a:latin typeface="Consolas" pitchFamily="34" charset="0"/>
-              </a:rPr>
-              <a:t>async ValueTask&lt;int&gt; GetValueFast() {</a:t>
-            </a:r>
-          </a:p>
-          <a:p>
-            <a:pPr marL="0" indent="0">
-              <a:spcAft>
-                <a:spcPts val="200"/>
-              </a:spcAft>
-              <a:buNone/>
-            </a:pPr>
-            <a:r>
-              <a:rPr lang="en-US" sz="1100" dirty="0">
-                <a:solidFill>
-                  <a:srgbClr val="E2E8F0"/>
-                </a:solidFill>
-                <a:latin typeface="Consolas" pitchFamily="34" charset="0"/>
-              </a:rPr>
-              <a:t>    if (_cache.TryGetValue(key, out var cached))</a:t>
-            </a:r>
-          </a:p>
-          <a:p>
-            <a:pPr marL="0" indent="0">
-              <a:spcAft>
-                <a:spcPts val="200"/>
-              </a:spcAft>
-              <a:buNone/>
-            </a:pPr>
-            <a:r>
-              <a:rPr lang="en-US" sz="1100" dirty="0">
-                <a:solidFill>
-                  <a:srgbClr val="E2E8F0"/>
-                </a:solidFill>
-                <a:latin typeface="Consolas" pitchFamily="34" charset="0"/>
-              </a:rPr>
-              <a:t>        return cached;   // No suspension - zero heap allocation</a:t>
-            </a:r>
-          </a:p>
-          <a:p>
-            <a:pPr marL="0" indent="0">
-              <a:spcAft>
-                <a:spcPts val="200"/>
-              </a:spcAft>
-              <a:buNone/>
-            </a:pPr>
-            <a:r>
-              <a:rPr lang="en-US" sz="1100" dirty="0">
-                <a:solidFill>
-                  <a:srgbClr val="E2E8F0"/>
-                </a:solidFill>
-                <a:latin typeface="Consolas" pitchFamily="34" charset="0"/>
-              </a:rPr>
-              <a:t>    return await FetchAsync();  // Suspends - allocates one Task</a:t>
-            </a:r>
-          </a:p>
-          <a:p>
-            <a:pPr marL="0" indent="0">
-              <a:spcAft>
-                <a:spcPts val="200"/>
-              </a:spcAft>
-              <a:buNone/>
-            </a:pPr>
-            <a:r>
-              <a:rPr lang="en-US" sz="1100" dirty="0">
-                <a:solidFill>
-                  <a:srgbClr val="E2E8F0"/>
-                </a:solidFill>
-                <a:latin typeface="Consolas" pitchFamily="34" charset="0"/>
-              </a:rPr>
-              <a:t>}</a:t>
-            </a:r>
-          </a:p>
-          <a:p>
-            <a:pPr marL="0" indent="0">
-              <a:spcAft>
-                <a:spcPts val="200"/>
-              </a:spcAft>
-              <a:buNone/>
-            </a:pPr>
-            <a:endParaRPr lang="en-US" sz="1100" dirty="0">
-              <a:solidFill>
-                <a:srgbClr val="E2E8F0"/>
-              </a:solidFill>
-              <a:latin typeface="Consolas" pitchFamily="34" charset="0"/>
-            </a:endParaRPr>
-          </a:p>
-          <a:p>
-            <a:pPr marL="0" indent="0">
-              <a:spcAft>
-                <a:spcPts val="200"/>
-              </a:spcAft>
-              <a:buNone/>
-            </a:pPr>
-            <a:r>
-              <a:rPr lang="en-US" sz="1100" dirty="0">
-                <a:solidFill>
-                  <a:srgbClr val="E2E8F0"/>
-                </a:solidFill>
-                <a:latin typeface="Consolas" pitchFamily="34" charset="0"/>
-              </a:rPr>
-              <a:t>// Rules for ValueTask:</a:t>
-            </a:r>
-          </a:p>
-          <a:p>
-            <a:pPr marL="0" indent="0">
-              <a:spcAft>
-                <a:spcPts val="200"/>
-              </a:spcAft>
-              <a:buNone/>
-            </a:pPr>
-            <a:r>
-              <a:rPr lang="en-US" sz="1100" dirty="0">
-                <a:solidFill>
-                  <a:srgbClr val="E2E8F0"/>
-                </a:solidFill>
-                <a:latin typeface="Consolas" pitchFamily="34" charset="0"/>
-              </a:rPr>
-              <a:t>// - Await it directly - don't store and await later</a:t>
-            </a:r>
-          </a:p>
-          <a:p>
-            <a:pPr marL="0" indent="0">
-              <a:spcAft>
-                <a:spcPts val="200"/>
-              </a:spcAft>
-              <a:buNone/>
-            </a:pPr>
-            <a:r>
-              <a:rPr lang="en-US" sz="1100" dirty="0">
-                <a:solidFill>
-                  <a:srgbClr val="E2E8F0"/>
-                </a:solidFill>
-                <a:latin typeface="Consolas" pitchFamily="34" charset="0"/>
-              </a:rPr>
-              <a:t>// - Never await from multiple callers concurrently</a:t>
-            </a:r>
-          </a:p>
-          <a:p>
-            <a:pPr marL="0" indent="0">
-              <a:spcAft>
-                <a:spcPts val="200"/>
-              </a:spcAft>
-              <a:buNone/>
-            </a:pPr>
-            <a:r>
-              <a:rPr lang="en-US" sz="1100" dirty="0">
-                <a:solidFill>
-                  <a:srgbClr val="E2E8F0"/>
-                </a:solidFill>
-                <a:latin typeface="Consolas" pitchFamily="34" charset="0"/>
-              </a:rPr>
-              <a:t>// - IValueTaskSource: fully allocation-free advanced pattern</a:t>
-            </a:r>
-          </a:p>
         </p:txBody>
       </p:sp>
       <p:sp>
@@ -14518,7 +14066,7 @@
         </p:nvSpPr>
         <p:spPr>
           <a:xfrm>
-            <a:off x="6126480" y="1005840"/>
+            <a:off x="530352" y="999558"/>
             <a:ext cx="2743200" cy="3474720"/>
           </a:xfrm>
           <a:prstGeom prst="rect">
@@ -15075,78 +14623,6 @@
               <a:t>Runtime-aware async: .NET team exploring first-class runtime support for continuations</a:t>
             </a:r>
           </a:p>
-          <a:p>
-            <a:pPr marL="342900" indent="-342900">
-              <a:spcAft>
-                <a:spcPts val="600"/>
-              </a:spcAft>
-              <a:buSzPct val="100000"/>
-              <a:buChar char="•"/>
-            </a:pPr>
-            <a:r>
-              <a:rPr lang="en-US" sz="1200" dirty="0">
-                <a:solidFill>
-                  <a:srgbClr val="E2E8F0"/>
-                </a:solidFill>
-                <a:latin typeface="Calibri" pitchFamily="34" charset="0"/>
-              </a:rPr>
-              <a:t>Green threads / fibers: lighter weight, managed by the runtime scheduler not the OS</a:t>
-            </a:r>
-          </a:p>
-          <a:p>
-            <a:pPr marL="342900" indent="-342900">
-              <a:spcAft>
-                <a:spcPts val="600"/>
-              </a:spcAft>
-              <a:buSzPct val="100000"/>
-              <a:buChar char="•"/>
-            </a:pPr>
-            <a:r>
-              <a:rPr lang="en-US" sz="1200" dirty="0">
-                <a:solidFill>
-                  <a:srgbClr val="E2E8F0"/>
-                </a:solidFill>
-                <a:latin typeface="Calibri" pitchFamily="34" charset="0"/>
-              </a:rPr>
-              <a:t>Eliminates heap boxing - state machines can stay on the stack throughout</a:t>
-            </a:r>
-          </a:p>
-          <a:p>
-            <a:pPr marL="342900" indent="-342900">
-              <a:spcAft>
-                <a:spcPts val="600"/>
-              </a:spcAft>
-              <a:buSzPct val="100000"/>
-              <a:buChar char="•"/>
-            </a:pPr>
-            <a:r>
-              <a:rPr lang="en-US" sz="1200" dirty="0">
-                <a:solidFill>
-                  <a:srgbClr val="E2E8F0"/>
-                </a:solidFill>
-                <a:latin typeface="Calibri" pitchFamily="34" charset="0"/>
-              </a:rPr>
-              <a:t>Structured concurrency and async streams (IAsyncEnumerable) already in BCL</a:t>
-            </a:r>
-          </a:p>
-          <a:p>
-            <a:pPr marL="342900" indent="-342900">
-              <a:spcAft>
-                <a:spcPts val="600"/>
-              </a:spcAft>
-              <a:buSzPct val="100000"/>
-              <a:buChar char="•"/>
-            </a:pPr>
-            <a:r>
-              <a:rPr lang="en-US" sz="1200" dirty="0">
-                <a:solidFill>
-                  <a:srgbClr val="E2E8F0"/>
-                </a:solidFill>
-                <a:latin typeface="Calibri" pitchFamily="34" charset="0"/>
-              </a:rPr>
-              <a:t>dotnet/runtime: async-generator and green-threads proposals actively discussed</a:t>
-            </a:r>
-          </a:p>
         </p:txBody>
       </p:sp>
       <p:sp>
@@ -15157,7 +14633,7 @@
         </p:nvSpPr>
         <p:spPr>
           <a:xfrm>
-            <a:off x="457200" y="3474720"/>
+            <a:off x="457200" y="3108960"/>
             <a:ext cx="8229600" cy="1280160"/>
           </a:xfrm>
           <a:prstGeom prst="rect">
@@ -15191,7 +14667,7 @@
         </p:nvSpPr>
         <p:spPr>
           <a:xfrm>
-            <a:off x="594360" y="3566160"/>
+            <a:off x="571500" y="3268980"/>
             <a:ext cx="7955280" cy="1097280"/>
           </a:xfrm>
           <a:prstGeom prst="rect">
@@ -15298,7 +14774,7 @@
         </p:nvSpPr>
         <p:spPr>
           <a:xfrm>
-            <a:off x="457200" y="4206240"/>
+            <a:off x="457200" y="4389120"/>
             <a:ext cx="8229600" cy="640080"/>
           </a:xfrm>
           <a:prstGeom prst="rect">
@@ -15325,7 +14801,7 @@
         </p:nvSpPr>
         <p:spPr>
           <a:xfrm>
-            <a:off x="457200" y="4206240"/>
+            <a:off x="457200" y="4389120"/>
             <a:ext cx="73152" cy="640080"/>
           </a:xfrm>
           <a:prstGeom prst="rect">
@@ -15352,7 +14828,7 @@
         </p:nvSpPr>
         <p:spPr>
           <a:xfrm>
-            <a:off x="777240" y="4206240"/>
+            <a:off x="777240" y="4389120"/>
             <a:ext cx="7772400" cy="640080"/>
           </a:xfrm>
           <a:prstGeom prst="rect">
@@ -18180,310 +17656,20 @@
       </p:grpSpPr>
       <p:sp>
         <p:nvSpPr>
-          <p:cNvPr id="2" name="Text T"/>
-          <p:cNvSpPr/>
-          <p:nvPr/>
-        </p:nvSpPr>
-        <p:spPr>
-          <a:xfrm>
-            <a:off x="457200" y="228600"/>
-            <a:ext cx="8229600" cy="548640"/>
-          </a:xfrm>
-          <a:prstGeom prst="rect">
-            <a:avLst/>
-          </a:prstGeom>
-          <a:noFill/>
-          <a:ln/>
-        </p:spPr>
-        <p:txBody>
-          <a:bodyPr wrap="square" lIns="0" tIns="0" rIns="0" bIns="0" rtlCol="0" anchor="ctr"/>
-          <a:lstStyle/>
-          <a:p>
-            <a:pPr marL="0" indent="0">
-              <a:buNone/>
-            </a:pPr>
-            <a:r>
-              <a:rPr lang="en-US" sz="2800" b="1" dirty="0">
-                <a:solidFill>
-                  <a:srgbClr val="F1F5F9"/>
-                </a:solidFill>
-                <a:latin typeface="Trebuchet MS" pitchFamily="34" charset="0"/>
-              </a:rPr>
-              <a:t>ThreadPool, SynchronizationContext and the Classic Deadlock</a:t>
-            </a:r>
-          </a:p>
-        </p:txBody>
-      </p:sp>
-      <p:sp>
-        <p:nvSpPr>
-          <p:cNvPr id="3" name="Label"/>
-          <p:cNvSpPr/>
-          <p:nvPr/>
-        </p:nvSpPr>
-        <p:spPr>
-          <a:xfrm>
-            <a:off x="457200" y="960120"/>
-            <a:ext cx="4023360" cy="365760"/>
-          </a:xfrm>
-          <a:prstGeom prst="rect">
-            <a:avLst/>
-          </a:prstGeom>
-          <a:noFill/>
-          <a:ln/>
-        </p:spPr>
-        <p:txBody>
-          <a:bodyPr wrap="square" lIns="0" tIns="0" rIns="0" bIns="0" rtlCol="0" anchor="ctr"/>
-          <a:lstStyle/>
-          <a:p>
-            <a:pPr marL="0" indent="0">
-              <a:buNone/>
-            </a:pPr>
-            <a:r>
-              <a:rPr lang="en-US" sz="1600" b="1" dirty="0">
-                <a:solidFill>
-                  <a:srgbClr val="38BDF8"/>
-                </a:solidFill>
-                <a:latin typeface="Calibri" pitchFamily="34" charset="0"/>
-              </a:rPr>
-              <a:t>ThreadPool</a:t>
-            </a:r>
-          </a:p>
-        </p:txBody>
-      </p:sp>
-      <p:sp>
-        <p:nvSpPr>
-          <p:cNvPr id="4" name="Bullets"/>
-          <p:cNvSpPr/>
-          <p:nvPr/>
-        </p:nvSpPr>
-        <p:spPr>
-          <a:xfrm>
-            <a:off x="457200" y="1280160"/>
-            <a:ext cx="4023360" cy="1920240"/>
-          </a:xfrm>
-          <a:prstGeom prst="rect">
-            <a:avLst/>
-          </a:prstGeom>
-          <a:noFill/>
-          <a:ln/>
-        </p:spPr>
-        <p:txBody>
-          <a:bodyPr wrap="square" lIns="0" tIns="0" rIns="0" bIns="0" rtlCol="0" anchor="t"/>
-          <a:lstStyle/>
-          <a:p>
-            <a:pPr marL="342900" indent="-342900">
-              <a:spcAft>
-                <a:spcPts val="600"/>
-              </a:spcAft>
-              <a:buSzPct val="100000"/>
-              <a:buChar char="•"/>
-            </a:pPr>
-            <a:r>
-              <a:rPr lang="en-US" sz="1200" dirty="0">
-                <a:solidFill>
-                  <a:srgbClr val="E2E8F0"/>
-                </a:solidFill>
-                <a:latin typeface="Calibri" pitchFamily="34" charset="0"/>
-              </a:rPr>
-              <a:t>Pool of pre-created worker threads - reuse avoids per-thread allocation</a:t>
-            </a:r>
-          </a:p>
-          <a:p>
-            <a:pPr marL="342900" indent="-342900">
-              <a:spcAft>
-                <a:spcPts val="600"/>
-              </a:spcAft>
-              <a:buSzPct val="100000"/>
-              <a:buChar char="•"/>
-            </a:pPr>
-            <a:r>
-              <a:rPr lang="en-US" sz="1200" dirty="0">
-                <a:solidFill>
-                  <a:srgbClr val="E2E8F0"/>
-                </a:solidFill>
-                <a:latin typeface="Calibri" pitchFamily="34" charset="0"/>
-              </a:rPr>
-              <a:t>Task.Run() and async continuations queue work here by default</a:t>
-            </a:r>
-          </a:p>
-          <a:p>
-            <a:pPr marL="342900" indent="-342900">
-              <a:spcAft>
-                <a:spcPts val="600"/>
-              </a:spcAft>
-              <a:buSzPct val="100000"/>
-              <a:buChar char="•"/>
-            </a:pPr>
-            <a:r>
-              <a:rPr lang="en-US" sz="1200" dirty="0">
-                <a:solidFill>
-                  <a:srgbClr val="E2E8F0"/>
-                </a:solidFill>
-                <a:latin typeface="Calibri" pitchFamily="34" charset="0"/>
-              </a:rPr>
-              <a:t>Starts ~1 thread/CPU core; slowly grows under load (~1 per 500ms)</a:t>
-            </a:r>
-          </a:p>
-          <a:p>
-            <a:pPr marL="342900" indent="-342900">
-              <a:spcAft>
-                <a:spcPts val="600"/>
-              </a:spcAft>
-              <a:buSzPct val="100000"/>
-              <a:buChar char="•"/>
-            </a:pPr>
-            <a:r>
-              <a:rPr lang="en-US" sz="1200" dirty="0">
-                <a:solidFill>
-                  <a:srgbClr val="E2E8F0"/>
-                </a:solidFill>
-                <a:latin typeface="Calibri" pitchFamily="34" charset="0"/>
-              </a:rPr>
-              <a:t>DANGER: blocking threads with .Result/.Wait() starves the pool</a:t>
-            </a:r>
-          </a:p>
-        </p:txBody>
-      </p:sp>
-      <p:sp>
-        <p:nvSpPr>
-          <p:cNvPr id="5" name="Label"/>
-          <p:cNvSpPr/>
-          <p:nvPr/>
-        </p:nvSpPr>
-        <p:spPr>
-          <a:xfrm>
-            <a:off x="4663040" y="960120"/>
-            <a:ext cx="4023360" cy="365760"/>
-          </a:xfrm>
-          <a:prstGeom prst="rect">
-            <a:avLst/>
-          </a:prstGeom>
-          <a:noFill/>
-          <a:ln/>
-        </p:spPr>
-        <p:txBody>
-          <a:bodyPr wrap="square" lIns="0" tIns="0" rIns="0" bIns="0" rtlCol="0" anchor="ctr"/>
-          <a:lstStyle/>
-          <a:p>
-            <a:pPr marL="0" indent="0">
-              <a:buNone/>
-            </a:pPr>
-            <a:r>
-              <a:rPr lang="en-US" sz="1600" b="1" dirty="0">
-                <a:solidFill>
-                  <a:srgbClr val="38BDF8"/>
-                </a:solidFill>
-                <a:latin typeface="Calibri" pitchFamily="34" charset="0"/>
-              </a:rPr>
-              <a:t>SynchronizationContext</a:t>
-            </a:r>
-          </a:p>
-        </p:txBody>
-      </p:sp>
-      <p:sp>
-        <p:nvSpPr>
-          <p:cNvPr id="6" name="Bullets"/>
-          <p:cNvSpPr/>
-          <p:nvPr/>
-        </p:nvSpPr>
-        <p:spPr>
-          <a:xfrm>
-            <a:off x="4663040" y="1280160"/>
-            <a:ext cx="4023360" cy="1920240"/>
-          </a:xfrm>
-          <a:prstGeom prst="rect">
-            <a:avLst/>
-          </a:prstGeom>
-          <a:noFill/>
-          <a:ln/>
-        </p:spPr>
-        <p:txBody>
-          <a:bodyPr wrap="square" lIns="0" tIns="0" rIns="0" bIns="0" rtlCol="0" anchor="t"/>
-          <a:lstStyle/>
-          <a:p>
-            <a:pPr marL="342900" indent="-342900">
-              <a:spcAft>
-                <a:spcPts val="600"/>
-              </a:spcAft>
-              <a:buSzPct val="100000"/>
-              <a:buChar char="•"/>
-            </a:pPr>
-            <a:r>
-              <a:rPr lang="en-US" sz="1200" dirty="0">
-                <a:solidFill>
-                  <a:srgbClr val="E2E8F0"/>
-                </a:solidFill>
-                <a:latin typeface="Calibri" pitchFamily="34" charset="0"/>
-              </a:rPr>
-              <a:t>Decides WHERE continuations run after an await</a:t>
-            </a:r>
-          </a:p>
-          <a:p>
-            <a:pPr marL="342900" indent="-342900">
-              <a:spcAft>
-                <a:spcPts val="600"/>
-              </a:spcAft>
-              <a:buSzPct val="100000"/>
-              <a:buChar char="•"/>
-            </a:pPr>
-            <a:r>
-              <a:rPr lang="en-US" sz="1200" dirty="0">
-                <a:solidFill>
-                  <a:srgbClr val="E2E8F0"/>
-                </a:solidFill>
-                <a:latin typeface="Calibri" pitchFamily="34" charset="0"/>
-              </a:rPr>
-              <a:t>WinForms/WPF: posts to the UI thread message loop</a:t>
-            </a:r>
-          </a:p>
-          <a:p>
-            <a:pPr marL="342900" indent="-342900">
-              <a:spcAft>
-                <a:spcPts val="600"/>
-              </a:spcAft>
-              <a:buSzPct val="100000"/>
-              <a:buChar char="•"/>
-            </a:pPr>
-            <a:r>
-              <a:rPr lang="en-US" sz="1200" dirty="0">
-                <a:solidFill>
-                  <a:srgbClr val="E2E8F0"/>
-                </a:solidFill>
-                <a:latin typeface="Calibri" pitchFamily="34" charset="0"/>
-              </a:rPr>
-              <a:t>ASP.NET Core / Console: null - continuations go to ThreadPool</a:t>
-            </a:r>
-          </a:p>
-          <a:p>
-            <a:pPr marL="342900" indent="-342900">
-              <a:spcAft>
-                <a:spcPts val="600"/>
-              </a:spcAft>
-              <a:buSzPct val="100000"/>
-              <a:buChar char="•"/>
-            </a:pPr>
-            <a:r>
-              <a:rPr lang="en-US" sz="1200" dirty="0">
-                <a:solidFill>
-                  <a:srgbClr val="E2E8F0"/>
-                </a:solidFill>
-                <a:latin typeface="Calibri" pitchFamily="34" charset="0"/>
-              </a:rPr>
-              <a:t>Priority: SynchCtx.Current -&gt; TaskScheduler.Default -&gt; ThreadPool</a:t>
-            </a:r>
-          </a:p>
-        </p:txBody>
-      </p:sp>
-      <p:sp>
-        <p:nvSpPr>
-          <p:cNvPr id="70" name="CodeBg"/>
-          <p:cNvSpPr/>
-          <p:nvPr/>
-        </p:nvSpPr>
-        <p:spPr>
-          <a:xfrm>
-            <a:off x="457200" y="3200400"/>
-            <a:ext cx="8229600" cy="1463040"/>
+          <p:cNvPr id="8" name="CodeBg">
+            <a:extLst>
+              <a:ext uri="{FF2B5EF4-FFF2-40B4-BE49-F238E27FC236}">
+                <a16:creationId xmlns:a16="http://schemas.microsoft.com/office/drawing/2014/main" id="{7BB6D4DE-A5D0-432D-4F67-A20C07782F0D}"/>
+              </a:ext>
+            </a:extLst>
+          </p:cNvPr>
+          <p:cNvSpPr/>
+          <p:nvPr/>
+        </p:nvSpPr>
+        <p:spPr>
+          <a:xfrm>
+            <a:off x="328067" y="880198"/>
+            <a:ext cx="8358733" cy="3200400"/>
           </a:xfrm>
           <a:prstGeom prst="rect">
             <a:avLst/>
@@ -18510,14 +17696,86 @@
       </p:sp>
       <p:sp>
         <p:nvSpPr>
-          <p:cNvPr id="7" name="Code"/>
-          <p:cNvSpPr/>
-          <p:nvPr/>
-        </p:nvSpPr>
-        <p:spPr>
-          <a:xfrm>
-            <a:off x="594360" y="3291840"/>
-            <a:ext cx="7955280" cy="1280160"/>
+          <p:cNvPr id="2" name="Text T"/>
+          <p:cNvSpPr/>
+          <p:nvPr/>
+        </p:nvSpPr>
+        <p:spPr>
+          <a:xfrm>
+            <a:off x="457200" y="228600"/>
+            <a:ext cx="8229600" cy="548640"/>
+          </a:xfrm>
+          <a:prstGeom prst="rect">
+            <a:avLst/>
+          </a:prstGeom>
+          <a:noFill/>
+          <a:ln/>
+        </p:spPr>
+        <p:txBody>
+          <a:bodyPr wrap="square" lIns="0" tIns="0" rIns="0" bIns="0" rtlCol="0" anchor="ctr"/>
+          <a:lstStyle/>
+          <a:p>
+            <a:pPr marL="0" indent="0">
+              <a:buNone/>
+            </a:pPr>
+            <a:r>
+              <a:rPr lang="en-US" sz="2800" b="1" dirty="0">
+                <a:solidFill>
+                  <a:srgbClr val="F1F5F9"/>
+                </a:solidFill>
+                <a:latin typeface="Trebuchet MS" pitchFamily="34" charset="0"/>
+              </a:rPr>
+              <a:t>ThreadPool, SynchronizationContext and the Classic Deadlock</a:t>
+            </a:r>
+          </a:p>
+        </p:txBody>
+      </p:sp>
+      <p:sp>
+        <p:nvSpPr>
+          <p:cNvPr id="3" name="Label"/>
+          <p:cNvSpPr/>
+          <p:nvPr/>
+        </p:nvSpPr>
+        <p:spPr>
+          <a:xfrm>
+            <a:off x="457200" y="960120"/>
+            <a:ext cx="4023360" cy="365760"/>
+          </a:xfrm>
+          <a:prstGeom prst="rect">
+            <a:avLst/>
+          </a:prstGeom>
+          <a:noFill/>
+          <a:ln/>
+        </p:spPr>
+        <p:txBody>
+          <a:bodyPr wrap="square" lIns="0" tIns="0" rIns="0" bIns="0" rtlCol="0" anchor="ctr"/>
+          <a:lstStyle/>
+          <a:p>
+            <a:pPr marL="0" indent="0">
+              <a:buNone/>
+            </a:pPr>
+            <a:r>
+              <a:rPr lang="en-US" sz="1600" b="1" dirty="0">
+                <a:solidFill>
+                  <a:srgbClr val="38BDF8"/>
+                </a:solidFill>
+                <a:latin typeface="Calibri" pitchFamily="34" charset="0"/>
+              </a:rPr>
+              <a:t>ThreadPool</a:t>
+            </a:r>
+          </a:p>
+        </p:txBody>
+      </p:sp>
+      <p:sp>
+        <p:nvSpPr>
+          <p:cNvPr id="4" name="Bullets"/>
+          <p:cNvSpPr/>
+          <p:nvPr/>
+        </p:nvSpPr>
+        <p:spPr>
+          <a:xfrm>
+            <a:off x="457200" y="1280160"/>
+            <a:ext cx="4023360" cy="1920240"/>
           </a:xfrm>
           <a:prstGeom prst="rect">
             <a:avLst/>
@@ -18529,139 +17787,205 @@
           <a:bodyPr wrap="square" lIns="0" tIns="0" rIns="0" bIns="0" rtlCol="0" anchor="t"/>
           <a:lstStyle/>
           <a:p>
-            <a:pPr marL="0" indent="0">
+            <a:pPr marL="342900" indent="-342900">
               <a:spcAft>
-                <a:spcPts val="200"/>
+                <a:spcPts val="600"/>
               </a:spcAft>
-              <a:buNone/>
-            </a:pPr>
-            <a:r>
-              <a:rPr lang="en-US" sz="1100" dirty="0">
+              <a:buSzPct val="100000"/>
+              <a:buChar char="•"/>
+            </a:pPr>
+            <a:r>
+              <a:rPr lang="en-US" sz="1200" dirty="0">
                 <a:solidFill>
                   <a:srgbClr val="E2E8F0"/>
                 </a:solidFill>
-                <a:latin typeface="Consolas" pitchFamily="34" charset="0"/>
-              </a:rPr>
-              <a:t>// The classic deadlock - DON'T DO THIS in UI code:</a:t>
-            </a:r>
-          </a:p>
-          <a:p>
-            <a:pPr marL="0" indent="0">
+                <a:latin typeface="Calibri" pitchFamily="34" charset="0"/>
+              </a:rPr>
+              <a:t>Pool of pre-created worker threads - reuse avoids per-thread allocation</a:t>
+            </a:r>
+          </a:p>
+          <a:p>
+            <a:pPr marL="342900" indent="-342900">
               <a:spcAft>
-                <a:spcPts val="200"/>
+                <a:spcPts val="600"/>
               </a:spcAft>
-              <a:buNone/>
-            </a:pPr>
-            <a:r>
-              <a:rPr lang="en-US" sz="1100" dirty="0">
+              <a:buSzPct val="100000"/>
+              <a:buChar char="•"/>
+            </a:pPr>
+            <a:r>
+              <a:rPr lang="en-US" sz="1200" dirty="0">
                 <a:solidFill>
                   <a:srgbClr val="E2E8F0"/>
                 </a:solidFill>
-                <a:latin typeface="Consolas" pitchFamily="34" charset="0"/>
-              </a:rPr>
-              <a:t>void ButtonClick() {</a:t>
-            </a:r>
-          </a:p>
-          <a:p>
-            <a:pPr marL="0" indent="0">
+                <a:latin typeface="Calibri" pitchFamily="34" charset="0"/>
+              </a:rPr>
+              <a:t>Task.Run() and async continuations queue work here by default</a:t>
+            </a:r>
+          </a:p>
+          <a:p>
+            <a:pPr marL="342900" indent="-342900">
               <a:spcAft>
-                <a:spcPts val="200"/>
+                <a:spcPts val="600"/>
               </a:spcAft>
-              <a:buNone/>
-            </a:pPr>
-            <a:r>
-              <a:rPr lang="en-US" sz="1100" dirty="0">
+              <a:buSzPct val="100000"/>
+              <a:buChar char="•"/>
+            </a:pPr>
+            <a:r>
+              <a:rPr lang="en-US" sz="1200" dirty="0">
                 <a:solidFill>
                   <a:srgbClr val="E2E8F0"/>
                 </a:solidFill>
-                <a:latin typeface="Consolas" pitchFamily="34" charset="0"/>
-              </a:rPr>
-              <a:t>    var r = SomeAsync().Result;  // 1. Blocks UI thread</a:t>
-            </a:r>
-          </a:p>
-          <a:p>
-            <a:pPr marL="0" indent="0">
+                <a:latin typeface="Calibri" pitchFamily="34" charset="0"/>
+              </a:rPr>
+              <a:t>Starts ~1 thread/CPU core; slowly grows under load (~1 per 500ms)</a:t>
+            </a:r>
+          </a:p>
+          <a:p>
+            <a:pPr marL="342900" indent="-342900">
               <a:spcAft>
-                <a:spcPts val="200"/>
+                <a:spcPts val="600"/>
               </a:spcAft>
-              <a:buNone/>
-            </a:pPr>
-            <a:r>
-              <a:rPr lang="en-US" sz="1100" dirty="0">
+              <a:buSzPct val="100000"/>
+              <a:buChar char="•"/>
+            </a:pPr>
+            <a:r>
+              <a:rPr lang="en-US" sz="1200" dirty="0">
                 <a:solidFill>
                   <a:srgbClr val="E2E8F0"/>
                 </a:solidFill>
-                <a:latin typeface="Consolas" pitchFamily="34" charset="0"/>
-              </a:rPr>
-              <a:t>}                                // 4. DEADLOCK</a:t>
-            </a:r>
-          </a:p>
-          <a:p>
-            <a:pPr marL="0" indent="0">
+                <a:latin typeface="Calibri" pitchFamily="34" charset="0"/>
+              </a:rPr>
+              <a:t>DANGER: blocking threads with .Result/.Wait() starves the pool</a:t>
+            </a:r>
+          </a:p>
+        </p:txBody>
+      </p:sp>
+      <p:sp>
+        <p:nvSpPr>
+          <p:cNvPr id="5" name="Label"/>
+          <p:cNvSpPr/>
+          <p:nvPr/>
+        </p:nvSpPr>
+        <p:spPr>
+          <a:xfrm>
+            <a:off x="4663040" y="960120"/>
+            <a:ext cx="4023360" cy="365760"/>
+          </a:xfrm>
+          <a:prstGeom prst="rect">
+            <a:avLst/>
+          </a:prstGeom>
+          <a:noFill/>
+          <a:ln/>
+        </p:spPr>
+        <p:txBody>
+          <a:bodyPr wrap="square" lIns="0" tIns="0" rIns="0" bIns="0" rtlCol="0" anchor="ctr"/>
+          <a:lstStyle/>
+          <a:p>
+            <a:pPr marL="0" indent="0">
+              <a:buNone/>
+            </a:pPr>
+            <a:r>
+              <a:rPr lang="en-US" sz="1600" b="1" dirty="0">
+                <a:solidFill>
+                  <a:srgbClr val="38BDF8"/>
+                </a:solidFill>
+                <a:latin typeface="Calibri" pitchFamily="34" charset="0"/>
+              </a:rPr>
+              <a:t>SynchronizationContext</a:t>
+            </a:r>
+          </a:p>
+        </p:txBody>
+      </p:sp>
+      <p:sp>
+        <p:nvSpPr>
+          <p:cNvPr id="6" name="Bullets"/>
+          <p:cNvSpPr/>
+          <p:nvPr/>
+        </p:nvSpPr>
+        <p:spPr>
+          <a:xfrm>
+            <a:off x="4663040" y="1280160"/>
+            <a:ext cx="4023360" cy="1920240"/>
+          </a:xfrm>
+          <a:prstGeom prst="rect">
+            <a:avLst/>
+          </a:prstGeom>
+          <a:noFill/>
+          <a:ln/>
+        </p:spPr>
+        <p:txBody>
+          <a:bodyPr wrap="square" lIns="0" tIns="0" rIns="0" bIns="0" rtlCol="0" anchor="t"/>
+          <a:lstStyle/>
+          <a:p>
+            <a:pPr marL="342900" indent="-342900">
               <a:spcAft>
-                <a:spcPts val="200"/>
+                <a:spcPts val="600"/>
               </a:spcAft>
-              <a:buNone/>
-            </a:pPr>
-            <a:r>
-              <a:rPr lang="en-US" sz="1100" dirty="0">
+              <a:buSzPct val="100000"/>
+              <a:buChar char="•"/>
+            </a:pPr>
+            <a:r>
+              <a:rPr lang="en-US" sz="1200" dirty="0">
                 <a:solidFill>
                   <a:srgbClr val="E2E8F0"/>
                 </a:solidFill>
-                <a:latin typeface="Consolas" pitchFamily="34" charset="0"/>
-              </a:rPr>
-              <a:t>async Task SomeAsync() {</a:t>
-            </a:r>
-          </a:p>
-          <a:p>
-            <a:pPr marL="0" indent="0">
+                <a:latin typeface="Calibri" pitchFamily="34" charset="0"/>
+              </a:rPr>
+              <a:t>Decides WHERE continuations run after an await</a:t>
+            </a:r>
+          </a:p>
+          <a:p>
+            <a:pPr marL="342900" indent="-342900">
               <a:spcAft>
-                <a:spcPts val="200"/>
+                <a:spcPts val="600"/>
               </a:spcAft>
-              <a:buNone/>
-            </a:pPr>
-            <a:r>
-              <a:rPr lang="en-US" sz="1100" dirty="0">
+              <a:buSzPct val="100000"/>
+              <a:buChar char="•"/>
+            </a:pPr>
+            <a:r>
+              <a:rPr lang="en-US" sz="1200" dirty="0">
                 <a:solidFill>
                   <a:srgbClr val="E2E8F0"/>
                 </a:solidFill>
-                <a:latin typeface="Consolas" pitchFamily="34" charset="0"/>
-              </a:rPr>
-              <a:t>    await Task.Delay(1000);      // 2. Captures UI context</a:t>
-            </a:r>
-          </a:p>
-          <a:p>
-            <a:pPr marL="0" indent="0">
+                <a:latin typeface="Calibri" pitchFamily="34" charset="0"/>
+              </a:rPr>
+              <a:t>WinForms/WPF: posts to the UI thread message loop</a:t>
+            </a:r>
+          </a:p>
+          <a:p>
+            <a:pPr marL="342900" indent="-342900">
               <a:spcAft>
-                <a:spcPts val="200"/>
+                <a:spcPts val="600"/>
               </a:spcAft>
-              <a:buNone/>
-            </a:pPr>
-            <a:r>
-              <a:rPr lang="en-US" sz="1100" dirty="0">
+              <a:buSzPct val="100000"/>
+              <a:buChar char="•"/>
+            </a:pPr>
+            <a:r>
+              <a:rPr lang="en-US" sz="1200" dirty="0">
                 <a:solidFill>
                   <a:srgbClr val="E2E8F0"/>
                 </a:solidFill>
-                <a:latin typeface="Consolas" pitchFamily="34" charset="0"/>
-              </a:rPr>
-              <a:t>    // 3. Tries to post back to UI thread... which is blocked</a:t>
-            </a:r>
-          </a:p>
-          <a:p>
-            <a:pPr marL="0" indent="0">
+                <a:latin typeface="Calibri" pitchFamily="34" charset="0"/>
+              </a:rPr>
+              <a:t>ASP.NET Core / Console: null - continuations go to ThreadPool</a:t>
+            </a:r>
+          </a:p>
+          <a:p>
+            <a:pPr marL="342900" indent="-342900">
               <a:spcAft>
-                <a:spcPts val="200"/>
+                <a:spcPts val="600"/>
               </a:spcAft>
-              <a:buNone/>
-            </a:pPr>
-            <a:r>
-              <a:rPr lang="en-US" sz="1100" dirty="0">
+              <a:buSzPct val="100000"/>
+              <a:buChar char="•"/>
+            </a:pPr>
+            <a:r>
+              <a:rPr lang="en-US" sz="1200" dirty="0">
                 <a:solidFill>
                   <a:srgbClr val="E2E8F0"/>
                 </a:solidFill>
-                <a:latin typeface="Consolas" pitchFamily="34" charset="0"/>
-              </a:rPr>
-              <a:t>}</a:t>
+                <a:latin typeface="Calibri" pitchFamily="34" charset="0"/>
+              </a:rPr>
+              <a:t>Priority: SynchCtx.Current -&gt; TaskScheduler.Default -&gt; ThreadPool</a:t>
             </a:r>
           </a:p>
         </p:txBody>
@@ -18674,7 +17998,7 @@
         </p:nvSpPr>
         <p:spPr>
           <a:xfrm>
-            <a:off x="457200" y="4206240"/>
+            <a:off x="457200" y="4503420"/>
             <a:ext cx="8229600" cy="640080"/>
           </a:xfrm>
           <a:prstGeom prst="rect">
@@ -18701,7 +18025,7 @@
         </p:nvSpPr>
         <p:spPr>
           <a:xfrm>
-            <a:off x="457200" y="4206240"/>
+            <a:off x="457200" y="4503420"/>
             <a:ext cx="73152" cy="640080"/>
           </a:xfrm>
           <a:prstGeom prst="rect">
@@ -18728,7 +18052,7 @@
         </p:nvSpPr>
         <p:spPr>
           <a:xfrm>
-            <a:off x="777240" y="4206240"/>
+            <a:off x="777240" y="4503420"/>
             <a:ext cx="7772400" cy="640080"/>
           </a:xfrm>
           <a:prstGeom prst="rect">
@@ -18922,23 +18246,6 @@
               </a:spcAft>
               <a:buNone/>
             </a:pPr>
-            <a:r>
-              <a:rPr lang="en-US" sz="1100" dirty="0">
-                <a:solidFill>
-                  <a:srgbClr val="E2E8F0"/>
-                </a:solidFill>
-                <a:latin typeface="Consolas" pitchFamily="34" charset="0"/>
-              </a:rPr>
-              <a:t>static AsyncLocal&lt;string&gt; _user = new AsyncLocal&lt;string&gt;();</a:t>
-            </a:r>
-          </a:p>
-          <a:p>
-            <a:pPr marL="0" indent="0">
-              <a:spcAft>
-                <a:spcPts val="200"/>
-              </a:spcAft>
-              <a:buNone/>
-            </a:pPr>
             <a:endParaRPr lang="en-US" sz="1100" dirty="0">
               <a:solidFill>
                 <a:srgbClr val="E2E8F0"/>
@@ -18946,207 +18253,6 @@
               <a:latin typeface="Consolas" pitchFamily="34" charset="0"/>
             </a:endParaRPr>
           </a:p>
-          <a:p>
-            <a:pPr marL="0" indent="0">
-              <a:spcAft>
-                <a:spcPts val="200"/>
-              </a:spcAft>
-              <a:buNone/>
-            </a:pPr>
-            <a:r>
-              <a:rPr lang="en-US" sz="1100" dirty="0">
-                <a:solidFill>
-                  <a:srgbClr val="E2E8F0"/>
-                </a:solidFill>
-                <a:latin typeface="Consolas" pitchFamily="34" charset="0"/>
-              </a:rPr>
-              <a:t>async Task DemoAsyncLocal() {</a:t>
-            </a:r>
-          </a:p>
-          <a:p>
-            <a:pPr marL="0" indent="0">
-              <a:spcAft>
-                <a:spcPts val="200"/>
-              </a:spcAft>
-              <a:buNone/>
-            </a:pPr>
-            <a:r>
-              <a:rPr lang="en-US" sz="1100" dirty="0">
-                <a:solidFill>
-                  <a:srgbClr val="E2E8F0"/>
-                </a:solidFill>
-                <a:latin typeface="Consolas" pitchFamily="34" charset="0"/>
-              </a:rPr>
-              <a:t>    _user.Value = "Alice";</a:t>
-            </a:r>
-          </a:p>
-          <a:p>
-            <a:pPr marL="0" indent="0">
-              <a:spcAft>
-                <a:spcPts val="200"/>
-              </a:spcAft>
-              <a:buNone/>
-            </a:pPr>
-            <a:r>
-              <a:rPr lang="en-US" sz="1100" dirty="0">
-                <a:solidFill>
-                  <a:srgbClr val="E2E8F0"/>
-                </a:solidFill>
-                <a:latin typeface="Consolas" pitchFamily="34" charset="0"/>
-              </a:rPr>
-              <a:t>    await Task.Delay(500);</a:t>
-            </a:r>
-          </a:p>
-          <a:p>
-            <a:pPr marL="0" indent="0">
-              <a:spcAft>
-                <a:spcPts val="200"/>
-              </a:spcAft>
-              <a:buNone/>
-            </a:pPr>
-            <a:r>
-              <a:rPr lang="en-US" sz="1100" dirty="0">
-                <a:solidFill>
-                  <a:srgbClr val="E2E8F0"/>
-                </a:solidFill>
-                <a:latin typeface="Consolas" pitchFamily="34" charset="0"/>
-              </a:rPr>
-              <a:t>    // May be on a different thread now, but context was restored:</a:t>
-            </a:r>
-          </a:p>
-          <a:p>
-            <a:pPr marL="0" indent="0">
-              <a:spcAft>
-                <a:spcPts val="200"/>
-              </a:spcAft>
-              <a:buNone/>
-            </a:pPr>
-            <a:r>
-              <a:rPr lang="en-US" sz="1100" dirty="0">
-                <a:solidFill>
-                  <a:srgbClr val="E2E8F0"/>
-                </a:solidFill>
-                <a:latin typeface="Consolas" pitchFamily="34" charset="0"/>
-              </a:rPr>
-              <a:t>    Console.WriteLine(_user.Value);  // Still "Alice"!</a:t>
-            </a:r>
-          </a:p>
-          <a:p>
-            <a:pPr marL="0" indent="0">
-              <a:spcAft>
-                <a:spcPts val="200"/>
-              </a:spcAft>
-              <a:buNone/>
-            </a:pPr>
-            <a:endParaRPr lang="en-US" sz="1100" dirty="0">
-              <a:solidFill>
-                <a:srgbClr val="E2E8F0"/>
-              </a:solidFill>
-              <a:latin typeface="Consolas" pitchFamily="34" charset="0"/>
-            </a:endParaRPr>
-          </a:p>
-          <a:p>
-            <a:pPr marL="0" indent="0">
-              <a:spcAft>
-                <a:spcPts val="200"/>
-              </a:spcAft>
-              <a:buNone/>
-            </a:pPr>
-            <a:r>
-              <a:rPr lang="en-US" sz="1100" dirty="0">
-                <a:solidFill>
-                  <a:srgbClr val="E2E8F0"/>
-                </a:solidFill>
-                <a:latin typeface="Consolas" pitchFamily="34" charset="0"/>
-              </a:rPr>
-              <a:t>    await Task.Run(() =&gt; {</a:t>
-            </a:r>
-          </a:p>
-          <a:p>
-            <a:pPr marL="0" indent="0">
-              <a:spcAft>
-                <a:spcPts val="200"/>
-              </a:spcAft>
-              <a:buNone/>
-            </a:pPr>
-            <a:r>
-              <a:rPr lang="en-US" sz="1100" dirty="0">
-                <a:solidFill>
-                  <a:srgbClr val="E2E8F0"/>
-                </a:solidFill>
-                <a:latin typeface="Consolas" pitchFamily="34" charset="0"/>
-              </a:rPr>
-              <a:t>        Console.WriteLine(_user.Value);  // "Alice" (inherited)</a:t>
-            </a:r>
-          </a:p>
-          <a:p>
-            <a:pPr marL="0" indent="0">
-              <a:spcAft>
-                <a:spcPts val="200"/>
-              </a:spcAft>
-              <a:buNone/>
-            </a:pPr>
-            <a:r>
-              <a:rPr lang="en-US" sz="1100" dirty="0">
-                <a:solidFill>
-                  <a:srgbClr val="E2E8F0"/>
-                </a:solidFill>
-                <a:latin typeface="Consolas" pitchFamily="34" charset="0"/>
-              </a:rPr>
-              <a:t>        _user.Value = "Bob";             // Only affects child copy</a:t>
-            </a:r>
-          </a:p>
-          <a:p>
-            <a:pPr marL="0" indent="0">
-              <a:spcAft>
-                <a:spcPts val="200"/>
-              </a:spcAft>
-              <a:buNone/>
-            </a:pPr>
-            <a:r>
-              <a:rPr lang="en-US" sz="1100" dirty="0">
-                <a:solidFill>
-                  <a:srgbClr val="E2E8F0"/>
-                </a:solidFill>
-                <a:latin typeface="Consolas" pitchFamily="34" charset="0"/>
-              </a:rPr>
-              <a:t>    });</a:t>
-            </a:r>
-          </a:p>
-          <a:p>
-            <a:pPr marL="0" indent="0">
-              <a:spcAft>
-                <a:spcPts val="200"/>
-              </a:spcAft>
-              <a:buNone/>
-            </a:pPr>
-            <a:r>
-              <a:rPr lang="en-US" sz="1100" dirty="0">
-                <a:solidFill>
-                  <a:srgbClr val="E2E8F0"/>
-                </a:solidFill>
-                <a:latin typeface="Consolas" pitchFamily="34" charset="0"/>
-              </a:rPr>
-              <a:t>    Console.WriteLine(_user.Value);  // "Alice" (parent unchanged)</a:t>
-            </a:r>
-          </a:p>
-          <a:p>
-            <a:pPr marL="0" indent="0">
-              <a:spcAft>
-                <a:spcPts val="200"/>
-              </a:spcAft>
-              <a:buNone/>
-            </a:pPr>
-            <a:r>
-              <a:rPr lang="en-US" sz="1100" dirty="0">
-                <a:solidFill>
-                  <a:srgbClr val="E2E8F0"/>
-                </a:solidFill>
-                <a:latin typeface="Consolas" pitchFamily="34" charset="0"/>
-              </a:rPr>
-              <a:t>}</a:t>
-            </a:r>
-          </a:p>
         </p:txBody>
       </p:sp>
       <p:sp>
@@ -19157,7 +18263,7 @@
         </p:nvSpPr>
         <p:spPr>
           <a:xfrm>
-            <a:off x="6126480" y="1005840"/>
+            <a:off x="640080" y="1410689"/>
             <a:ext cx="2743200" cy="3200400"/>
           </a:xfrm>
           <a:prstGeom prst="rect">

--- a/presentation-r4.pptx
+++ b/presentation-r4.pptx
@@ -14694,23 +14694,6 @@
                 <a:latin typeface="Consolas" pitchFamily="34" charset="0"/>
               </a:rPr>
               <a:t>// Today: compiler transforms async methods into state machine structs, boxes to heap on suspend</a:t>
-            </a:r>
-          </a:p>
-          <a:p>
-            <a:pPr marL="0" indent="0">
-              <a:spcAft>
-                <a:spcPts val="200"/>
-              </a:spcAft>
-              <a:buNone/>
-            </a:pPr>
-            <a:r>
-              <a:rPr lang="en-US" sz="1100" dirty="0">
-                <a:solidFill>
-                  <a:srgbClr val="E2E8F0"/>
-                </a:solidFill>
-                <a:latin typeface="Consolas" pitchFamily="34" charset="0"/>
-              </a:rPr>
-              <a:t>// The vision: runtime manages continuations as first-class lightweight fibers</a:t>
             </a:r>
           </a:p>
           <a:p>
